--- a/ゲーム科1年/00_前期/プログラミングⅡ/18_const修飾子.pptx
+++ b/ゲーム科1年/00_前期/プログラミングⅡ/18_const修飾子.pptx
@@ -5,16 +5,10 @@
     <p:sldMasterId id="2147483648" r:id="rId1"/>
   </p:sldMasterIdLst>
   <p:sldIdLst>
-    <p:sldId id="257" r:id="rId2"/>
-    <p:sldId id="258" r:id="rId3"/>
+    <p:sldId id="258" r:id="rId2"/>
+    <p:sldId id="257" r:id="rId3"/>
     <p:sldId id="259" r:id="rId4"/>
     <p:sldId id="260" r:id="rId5"/>
-    <p:sldId id="261" r:id="rId6"/>
-    <p:sldId id="262" r:id="rId7"/>
-    <p:sldId id="263" r:id="rId8"/>
-    <p:sldId id="264" r:id="rId9"/>
-    <p:sldId id="265" r:id="rId10"/>
-    <p:sldId id="266" r:id="rId11"/>
   </p:sldIdLst>
   <p:sldSz cx="12192000" cy="6858000"/>
   <p:notesSz cx="6858000" cy="9144000"/>
@@ -268,7 +262,7 @@
           <a:p>
             <a:fld id="{E9CC885B-4903-4D54-9A93-00025F12DED9}" type="datetimeFigureOut">
               <a:rPr kumimoji="1" lang="ja-JP" altLang="en-US" smtClean="0"/>
-              <a:t>2024/11/19</a:t>
+              <a:t>2026/3/3</a:t>
             </a:fld>
             <a:endParaRPr kumimoji="1" lang="ja-JP" altLang="en-US"/>
           </a:p>
@@ -498,7 +492,7 @@
           <a:p>
             <a:fld id="{E9CC885B-4903-4D54-9A93-00025F12DED9}" type="datetimeFigureOut">
               <a:rPr kumimoji="1" lang="ja-JP" altLang="en-US" smtClean="0"/>
-              <a:t>2024/11/19</a:t>
+              <a:t>2026/3/3</a:t>
             </a:fld>
             <a:endParaRPr kumimoji="1" lang="ja-JP" altLang="en-US"/>
           </a:p>
@@ -738,7 +732,7 @@
           <a:p>
             <a:fld id="{E9CC885B-4903-4D54-9A93-00025F12DED9}" type="datetimeFigureOut">
               <a:rPr kumimoji="1" lang="ja-JP" altLang="en-US" smtClean="0"/>
-              <a:t>2024/11/19</a:t>
+              <a:t>2026/3/3</a:t>
             </a:fld>
             <a:endParaRPr kumimoji="1" lang="ja-JP" altLang="en-US"/>
           </a:p>
@@ -968,7 +962,7 @@
           <a:p>
             <a:fld id="{E9CC885B-4903-4D54-9A93-00025F12DED9}" type="datetimeFigureOut">
               <a:rPr kumimoji="1" lang="ja-JP" altLang="en-US" smtClean="0"/>
-              <a:t>2024/11/19</a:t>
+              <a:t>2026/3/3</a:t>
             </a:fld>
             <a:endParaRPr kumimoji="1" lang="ja-JP" altLang="en-US"/>
           </a:p>
@@ -1243,7 +1237,7 @@
           <a:p>
             <a:fld id="{E9CC885B-4903-4D54-9A93-00025F12DED9}" type="datetimeFigureOut">
               <a:rPr kumimoji="1" lang="ja-JP" altLang="en-US" smtClean="0"/>
-              <a:t>2024/11/19</a:t>
+              <a:t>2026/3/3</a:t>
             </a:fld>
             <a:endParaRPr kumimoji="1" lang="ja-JP" altLang="en-US"/>
           </a:p>
@@ -1572,7 +1566,7 @@
           <a:p>
             <a:fld id="{E9CC885B-4903-4D54-9A93-00025F12DED9}" type="datetimeFigureOut">
               <a:rPr kumimoji="1" lang="ja-JP" altLang="en-US" smtClean="0"/>
-              <a:t>2024/11/19</a:t>
+              <a:t>2026/3/3</a:t>
             </a:fld>
             <a:endParaRPr kumimoji="1" lang="ja-JP" altLang="en-US"/>
           </a:p>
@@ -2048,7 +2042,7 @@
           <a:p>
             <a:fld id="{E9CC885B-4903-4D54-9A93-00025F12DED9}" type="datetimeFigureOut">
               <a:rPr kumimoji="1" lang="ja-JP" altLang="en-US" smtClean="0"/>
-              <a:t>2024/11/19</a:t>
+              <a:t>2026/3/3</a:t>
             </a:fld>
             <a:endParaRPr kumimoji="1" lang="ja-JP" altLang="en-US"/>
           </a:p>
@@ -2189,7 +2183,7 @@
           <a:p>
             <a:fld id="{E9CC885B-4903-4D54-9A93-00025F12DED9}" type="datetimeFigureOut">
               <a:rPr kumimoji="1" lang="ja-JP" altLang="en-US" smtClean="0"/>
-              <a:t>2024/11/19</a:t>
+              <a:t>2026/3/3</a:t>
             </a:fld>
             <a:endParaRPr kumimoji="1" lang="ja-JP" altLang="en-US"/>
           </a:p>
@@ -2302,7 +2296,7 @@
           <a:p>
             <a:fld id="{E9CC885B-4903-4D54-9A93-00025F12DED9}" type="datetimeFigureOut">
               <a:rPr kumimoji="1" lang="ja-JP" altLang="en-US" smtClean="0"/>
-              <a:t>2024/11/19</a:t>
+              <a:t>2026/3/3</a:t>
             </a:fld>
             <a:endParaRPr kumimoji="1" lang="ja-JP" altLang="en-US"/>
           </a:p>
@@ -2645,7 +2639,7 @@
           <a:p>
             <a:fld id="{E9CC885B-4903-4D54-9A93-00025F12DED9}" type="datetimeFigureOut">
               <a:rPr kumimoji="1" lang="ja-JP" altLang="en-US" smtClean="0"/>
-              <a:t>2024/11/19</a:t>
+              <a:t>2026/3/3</a:t>
             </a:fld>
             <a:endParaRPr kumimoji="1" lang="ja-JP" altLang="en-US"/>
           </a:p>
@@ -2933,7 +2927,7 @@
           <a:p>
             <a:fld id="{E9CC885B-4903-4D54-9A93-00025F12DED9}" type="datetimeFigureOut">
               <a:rPr kumimoji="1" lang="ja-JP" altLang="en-US" smtClean="0"/>
-              <a:t>2024/11/19</a:t>
+              <a:t>2026/3/3</a:t>
             </a:fld>
             <a:endParaRPr kumimoji="1" lang="ja-JP" altLang="en-US"/>
           </a:p>
@@ -3206,7 +3200,7 @@
           <a:p>
             <a:fld id="{E9CC885B-4903-4D54-9A93-00025F12DED9}" type="datetimeFigureOut">
               <a:rPr kumimoji="1" lang="ja-JP" altLang="en-US" smtClean="0"/>
-              <a:t>2024/11/19</a:t>
+              <a:t>2026/3/3</a:t>
             </a:fld>
             <a:endParaRPr kumimoji="1" lang="ja-JP" altLang="en-US"/>
           </a:p>
@@ -3638,7 +3632,7 @@
         <p:spPr>
           <a:xfrm>
             <a:off x="567542" y="491954"/>
-            <a:ext cx="2646878" cy="584775"/>
+            <a:ext cx="2513830" cy="584775"/>
           </a:xfrm>
           <a:prstGeom prst="rect">
             <a:avLst/>
@@ -3652,8 +3646,12 @@
           <a:lstStyle/>
           <a:p>
             <a:r>
+              <a:rPr lang="en-US" altLang="ja-JP" sz="3200" b="1" u="sng" dirty="0"/>
+              <a:t>const</a:t>
+            </a:r>
+            <a:r>
               <a:rPr lang="ja-JP" altLang="en-US" sz="3200" b="1" u="sng" dirty="0"/>
-              <a:t>ファイル操作</a:t>
+              <a:t>修飾子</a:t>
             </a:r>
             <a:endParaRPr kumimoji="1" lang="ja-JP" altLang="en-US" sz="3200" b="1" u="sng" dirty="0"/>
           </a:p>
@@ -3674,7 +3672,7 @@
         <p:spPr>
           <a:xfrm>
             <a:off x="567542" y="1189161"/>
-            <a:ext cx="10033516" cy="1938992"/>
+            <a:ext cx="6340197" cy="4154984"/>
           </a:xfrm>
           <a:prstGeom prst="rect">
             <a:avLst/>
@@ -3688,169 +3686,82 @@
           <a:lstStyle/>
           <a:p>
             <a:r>
-              <a:rPr lang="en-US" altLang="ja-JP" sz="2400" dirty="0"/>
-              <a:t>C</a:t>
-            </a:r>
-            <a:r>
               <a:rPr lang="ja-JP" altLang="en-US" sz="2400" dirty="0"/>
-              <a:t>言語の</a:t>
-            </a:r>
+              <a:t>プログラムには２つの種類の数があります。</a:t>
+            </a:r>
+            <a:endParaRPr lang="en-US" altLang="ja-JP" sz="2400" dirty="0"/>
+          </a:p>
+          <a:p>
+            <a:endParaRPr lang="en-US" altLang="ja-JP" sz="2400" dirty="0"/>
+          </a:p>
+          <a:p>
             <a:r>
               <a:rPr lang="ja-JP" altLang="en-US" sz="2400" b="1" dirty="0">
                 <a:solidFill>
                   <a:srgbClr val="FF0000"/>
                 </a:solidFill>
               </a:rPr>
-              <a:t>ファイル操作</a:t>
-            </a:r>
+              <a:t>■変数</a:t>
+            </a:r>
+            <a:endParaRPr lang="en-US" altLang="ja-JP" sz="2400" b="1" dirty="0">
+              <a:solidFill>
+                <a:srgbClr val="FF0000"/>
+              </a:solidFill>
+            </a:endParaRPr>
+          </a:p>
+          <a:p>
             <a:r>
               <a:rPr lang="ja-JP" altLang="en-US" sz="2400" dirty="0"/>
-              <a:t>について練習します。</a:t>
+              <a:t>いつでも変更のできる数。</a:t>
             </a:r>
             <a:endParaRPr lang="en-US" altLang="ja-JP" sz="2400" dirty="0"/>
           </a:p>
           <a:p>
             <a:r>
               <a:rPr lang="ja-JP" altLang="en-US" sz="2400" dirty="0"/>
-              <a:t>最も汎用性のある</a:t>
-            </a:r>
+              <a:t>計算したり、上書きしたりする。</a:t>
+            </a:r>
+            <a:endParaRPr lang="en-US" altLang="ja-JP" sz="2400" dirty="0"/>
+          </a:p>
+          <a:p>
+            <a:endParaRPr lang="en-US" altLang="ja-JP" sz="2400" dirty="0"/>
+          </a:p>
+          <a:p>
             <a:r>
               <a:rPr lang="ja-JP" altLang="en-US" sz="2400" b="1" dirty="0">
                 <a:solidFill>
                   <a:srgbClr val="FF0000"/>
                 </a:solidFill>
               </a:rPr>
-              <a:t>構造体を使ったファイル操作</a:t>
-            </a:r>
+              <a:t>■定数</a:t>
+            </a:r>
+            <a:endParaRPr lang="en-US" altLang="ja-JP" sz="2400" b="1" dirty="0">
+              <a:solidFill>
+                <a:srgbClr val="FF0000"/>
+              </a:solidFill>
+            </a:endParaRPr>
+          </a:p>
+          <a:p>
             <a:r>
               <a:rPr lang="ja-JP" altLang="en-US" sz="2400" dirty="0"/>
-              <a:t>を練習しましょう。</a:t>
+              <a:t>初期値から変更のできない数。</a:t>
             </a:r>
             <a:endParaRPr lang="en-US" altLang="ja-JP" sz="2400" dirty="0"/>
           </a:p>
           <a:p>
+            <a:r>
+              <a:rPr lang="ja-JP" altLang="en-US" sz="2400" dirty="0"/>
+              <a:t>あらかじめ定義しておきたい数など。</a:t>
+            </a:r>
             <a:endParaRPr lang="en-US" altLang="ja-JP" sz="2400" dirty="0"/>
           </a:p>
           <a:p>
-            <a:r>
-              <a:rPr lang="en-US" altLang="ja-JP" sz="2400" b="1" dirty="0">
-                <a:solidFill>
-                  <a:srgbClr val="00B050"/>
-                </a:solidFill>
-              </a:rPr>
-              <a:t>MEMO</a:t>
-            </a:r>
+            <a:endParaRPr lang="en-US" altLang="ja-JP" sz="2400" dirty="0"/>
           </a:p>
           <a:p>
             <a:r>
               <a:rPr lang="ja-JP" altLang="en-US" sz="2400" dirty="0"/>
-              <a:t>ファイル操作とは、別のファイルを読み込んだり書き込んだりすること</a:t>
-            </a:r>
-            <a:endParaRPr lang="en-US" altLang="ja-JP" sz="2400" dirty="0"/>
-          </a:p>
-        </p:txBody>
-      </p:sp>
-    </p:spTree>
-    <p:extLst>
-      <p:ext uri="{BB962C8B-B14F-4D97-AF65-F5344CB8AC3E}">
-        <p14:creationId xmlns:p14="http://schemas.microsoft.com/office/powerpoint/2010/main" val="4044318111"/>
-      </p:ext>
-    </p:extLst>
-  </p:cSld>
-  <p:clrMapOvr>
-    <a:masterClrMapping/>
-  </p:clrMapOvr>
-</p:sld>
-</file>
-
-<file path=ppt/slides/slide10.xml><?xml version="1.0" encoding="utf-8"?>
-<p:sld xmlns:a="http://schemas.openxmlformats.org/drawingml/2006/main" xmlns:r="http://schemas.openxmlformats.org/officeDocument/2006/relationships" xmlns:p="http://schemas.openxmlformats.org/presentationml/2006/main">
-  <p:cSld>
-    <p:spTree>
-      <p:nvGrpSpPr>
-        <p:cNvPr id="1" name=""/>
-        <p:cNvGrpSpPr/>
-        <p:nvPr/>
-      </p:nvGrpSpPr>
-      <p:grpSpPr>
-        <a:xfrm>
-          <a:off x="0" y="0"/>
-          <a:ext cx="0" cy="0"/>
-          <a:chOff x="0" y="0"/>
-          <a:chExt cx="0" cy="0"/>
-        </a:xfrm>
-      </p:grpSpPr>
-      <p:sp>
-        <p:nvSpPr>
-          <p:cNvPr id="4" name="テキスト ボックス 3">
-            <a:extLst>
-              <a:ext uri="{FF2B5EF4-FFF2-40B4-BE49-F238E27FC236}">
-                <a16:creationId xmlns:a16="http://schemas.microsoft.com/office/drawing/2014/main" id="{5A13BF46-B8C5-48AA-8308-C9ECFF431A18}"/>
-              </a:ext>
-            </a:extLst>
-          </p:cNvPr>
-          <p:cNvSpPr txBox="1"/>
-          <p:nvPr/>
-        </p:nvSpPr>
-        <p:spPr>
-          <a:xfrm>
-            <a:off x="567542" y="491954"/>
-            <a:ext cx="2646878" cy="584775"/>
-          </a:xfrm>
-          <a:prstGeom prst="rect">
-            <a:avLst/>
-          </a:prstGeom>
-          <a:noFill/>
-        </p:spPr>
-        <p:txBody>
-          <a:bodyPr wrap="none" rtlCol="0">
-            <a:spAutoFit/>
-          </a:bodyPr>
-          <a:lstStyle/>
-          <a:p>
-            <a:r>
-              <a:rPr lang="ja-JP" altLang="en-US" sz="3200" b="1" u="sng" dirty="0"/>
-              <a:t>ファイル操作</a:t>
-            </a:r>
-            <a:endParaRPr kumimoji="1" lang="ja-JP" altLang="en-US" sz="3200" b="1" u="sng" dirty="0"/>
-          </a:p>
-        </p:txBody>
-      </p:sp>
-      <p:sp>
-        <p:nvSpPr>
-          <p:cNvPr id="9" name="テキスト ボックス 8">
-            <a:extLst>
-              <a:ext uri="{FF2B5EF4-FFF2-40B4-BE49-F238E27FC236}">
-                <a16:creationId xmlns:a16="http://schemas.microsoft.com/office/drawing/2014/main" id="{80F412F9-EC22-472D-8334-55F86CA5630B}"/>
-              </a:ext>
-            </a:extLst>
-          </p:cNvPr>
-          <p:cNvSpPr txBox="1"/>
-          <p:nvPr/>
-        </p:nvSpPr>
-        <p:spPr>
-          <a:xfrm>
-            <a:off x="567542" y="1189161"/>
-            <a:ext cx="8186857" cy="830997"/>
-          </a:xfrm>
-          <a:prstGeom prst="rect">
-            <a:avLst/>
-          </a:prstGeom>
-          <a:noFill/>
-        </p:spPr>
-        <p:txBody>
-          <a:bodyPr wrap="none" rtlCol="0">
-            <a:spAutoFit/>
-          </a:bodyPr>
-          <a:lstStyle/>
-          <a:p>
-            <a:r>
-              <a:rPr lang="en-US" altLang="ja-JP" sz="2400" b="1" dirty="0" err="1">
-                <a:solidFill>
-                  <a:srgbClr val="FF0000"/>
-                </a:solidFill>
-              </a:rPr>
-              <a:t>fread_s</a:t>
+              <a:t>今回は</a:t>
             </a:r>
             <a:r>
               <a:rPr lang="ja-JP" altLang="en-US" sz="2400" b="1" dirty="0">
@@ -3858,186 +3769,20 @@
                   <a:srgbClr val="FF0000"/>
                 </a:solidFill>
               </a:rPr>
-              <a:t>関数</a:t>
+              <a:t>定数</a:t>
             </a:r>
             <a:r>
               <a:rPr lang="ja-JP" altLang="en-US" sz="2400" dirty="0"/>
-              <a:t>で</a:t>
-            </a:r>
-            <a:r>
-              <a:rPr lang="ja-JP" altLang="en-US" sz="2400" b="1" dirty="0">
-                <a:solidFill>
-                  <a:srgbClr val="FF0000"/>
-                </a:solidFill>
-              </a:rPr>
-              <a:t>外部ファイルを読み込みます</a:t>
-            </a:r>
-            <a:r>
-              <a:rPr lang="ja-JP" altLang="en-US" sz="2400" dirty="0"/>
-              <a:t>。</a:t>
+              <a:t>について練習します。</a:t>
             </a:r>
             <a:endParaRPr lang="en-US" altLang="ja-JP" sz="2400" dirty="0"/>
           </a:p>
-          <a:p>
-            <a:r>
-              <a:rPr lang="ja-JP" altLang="en-US" sz="2400" dirty="0"/>
-              <a:t>読み込みモードで開いている時でないと処理できません。</a:t>
-            </a:r>
-            <a:endParaRPr lang="en-US" altLang="ja-JP" sz="2400" dirty="0"/>
-          </a:p>
-        </p:txBody>
-      </p:sp>
-      <p:sp>
-        <p:nvSpPr>
-          <p:cNvPr id="8" name="テキスト ボックス 7">
-            <a:extLst>
-              <a:ext uri="{FF2B5EF4-FFF2-40B4-BE49-F238E27FC236}">
-                <a16:creationId xmlns:a16="http://schemas.microsoft.com/office/drawing/2014/main" id="{94312B42-5044-4F96-AE46-635C63E09F6D}"/>
-              </a:ext>
-            </a:extLst>
-          </p:cNvPr>
-          <p:cNvSpPr txBox="1"/>
-          <p:nvPr/>
-        </p:nvSpPr>
-        <p:spPr>
-          <a:xfrm>
-            <a:off x="567542" y="3223494"/>
-            <a:ext cx="6955750" cy="3046988"/>
-          </a:xfrm>
-          <a:prstGeom prst="rect">
-            <a:avLst/>
-          </a:prstGeom>
-          <a:noFill/>
-        </p:spPr>
-        <p:txBody>
-          <a:bodyPr wrap="none" rtlCol="0">
-            <a:spAutoFit/>
-          </a:bodyPr>
-          <a:lstStyle/>
-          <a:p>
-            <a:r>
-              <a:rPr lang="ja-JP" altLang="en-US" sz="2400" b="1" dirty="0">
-                <a:solidFill>
-                  <a:srgbClr val="FF0000"/>
-                </a:solidFill>
-              </a:rPr>
-              <a:t>■</a:t>
-            </a:r>
-            <a:r>
-              <a:rPr lang="en-US" altLang="ja-JP" sz="2400" b="1" dirty="0" err="1">
-                <a:solidFill>
-                  <a:srgbClr val="FF0000"/>
-                </a:solidFill>
-              </a:rPr>
-              <a:t>fread_s</a:t>
-            </a:r>
-            <a:r>
-              <a:rPr lang="ja-JP" altLang="en-US" sz="2400" b="1" dirty="0">
-                <a:solidFill>
-                  <a:srgbClr val="FF0000"/>
-                </a:solidFill>
-              </a:rPr>
-              <a:t>の引数</a:t>
-            </a:r>
-            <a:endParaRPr lang="en-US" altLang="ja-JP" sz="2400" b="1" dirty="0">
-              <a:solidFill>
-                <a:srgbClr val="FF0000"/>
-              </a:solidFill>
-            </a:endParaRPr>
-          </a:p>
-          <a:p>
-            <a:r>
-              <a:rPr lang="ja-JP" altLang="en-US" sz="2400" dirty="0"/>
-              <a:t>１．読み込んだデータを格納する変数のアドレス</a:t>
-            </a:r>
-            <a:endParaRPr lang="en-US" altLang="ja-JP" sz="2400" dirty="0"/>
-          </a:p>
-          <a:p>
-            <a:r>
-              <a:rPr lang="ja-JP" altLang="en-US" sz="2400" dirty="0"/>
-              <a:t>２．１の変数のサイズ</a:t>
-            </a:r>
-            <a:endParaRPr lang="en-US" altLang="ja-JP" sz="2400" dirty="0"/>
-          </a:p>
-          <a:p>
-            <a:r>
-              <a:rPr lang="ja-JP" altLang="en-US" sz="2400" dirty="0"/>
-              <a:t>３．読み込むデータのサイズ</a:t>
-            </a:r>
-            <a:endParaRPr lang="en-US" altLang="ja-JP" sz="2400" dirty="0"/>
-          </a:p>
-          <a:p>
-            <a:r>
-              <a:rPr lang="ja-JP" altLang="en-US" sz="2400" dirty="0"/>
-              <a:t>４．読み込む回数</a:t>
-            </a:r>
-            <a:endParaRPr lang="en-US" altLang="ja-JP" sz="2400" dirty="0"/>
-          </a:p>
-          <a:p>
-            <a:r>
-              <a:rPr lang="ja-JP" altLang="en-US" sz="2400" dirty="0"/>
-              <a:t>５．ファイルポインタ</a:t>
-            </a:r>
-            <a:endParaRPr lang="en-US" altLang="ja-JP" sz="2400" dirty="0"/>
-          </a:p>
-          <a:p>
-            <a:endParaRPr lang="en-US" altLang="ja-JP" sz="2400" dirty="0"/>
-          </a:p>
-          <a:p>
-            <a:r>
-              <a:rPr lang="en-US" altLang="ja-JP" sz="2400" dirty="0"/>
-              <a:t>※</a:t>
-            </a:r>
-            <a:r>
-              <a:rPr lang="en-US" altLang="ja-JP" sz="2400" b="1" dirty="0" err="1">
-                <a:solidFill>
-                  <a:srgbClr val="0070C0"/>
-                </a:solidFill>
-              </a:rPr>
-              <a:t>sizeof</a:t>
-            </a:r>
-            <a:r>
-              <a:rPr lang="ja-JP" altLang="en-US" sz="2400" dirty="0"/>
-              <a:t>は型名を指定することもできます</a:t>
-            </a:r>
-            <a:endParaRPr lang="en-US" altLang="ja-JP" sz="2400" dirty="0"/>
-          </a:p>
-        </p:txBody>
-      </p:sp>
-      <p:pic>
-        <p:nvPicPr>
-          <p:cNvPr id="7" name="図 6">
-            <a:extLst>
-              <a:ext uri="{FF2B5EF4-FFF2-40B4-BE49-F238E27FC236}">
-                <a16:creationId xmlns:a16="http://schemas.microsoft.com/office/drawing/2014/main" id="{6755D46A-9D8B-429E-A07E-78D1336B4741}"/>
-              </a:ext>
-            </a:extLst>
-          </p:cNvPr>
-          <p:cNvPicPr>
-            <a:picLocks noChangeAspect="1"/>
-          </p:cNvPicPr>
-          <p:nvPr/>
-        </p:nvPicPr>
-        <p:blipFill>
-          <a:blip r:embed="rId2"/>
-          <a:stretch>
-            <a:fillRect/>
-          </a:stretch>
-        </p:blipFill>
-        <p:spPr>
-          <a:xfrm>
-            <a:off x="567542" y="2132590"/>
-            <a:ext cx="11046389" cy="860358"/>
-          </a:xfrm>
-          <a:prstGeom prst="rect">
-            <a:avLst/>
-          </a:prstGeom>
-        </p:spPr>
-      </p:pic>
+        </p:txBody>
+      </p:sp>
     </p:spTree>
     <p:extLst>
       <p:ext uri="{BB962C8B-B14F-4D97-AF65-F5344CB8AC3E}">
-        <p14:creationId xmlns:p14="http://schemas.microsoft.com/office/powerpoint/2010/main" val="3309324375"/>
+        <p14:creationId xmlns:p14="http://schemas.microsoft.com/office/powerpoint/2010/main" val="2931075229"/>
       </p:ext>
     </p:extLst>
   </p:cSld>
@@ -4079,7 +3824,7 @@
         <p:spPr>
           <a:xfrm>
             <a:off x="567542" y="491954"/>
-            <a:ext cx="2646878" cy="584775"/>
+            <a:ext cx="2513830" cy="584775"/>
           </a:xfrm>
           <a:prstGeom prst="rect">
             <a:avLst/>
@@ -4093,8 +3838,12 @@
           <a:lstStyle/>
           <a:p>
             <a:r>
+              <a:rPr lang="en-US" altLang="ja-JP" sz="3200" b="1" u="sng" dirty="0"/>
+              <a:t>const</a:t>
+            </a:r>
+            <a:r>
               <a:rPr lang="ja-JP" altLang="en-US" sz="3200" b="1" u="sng" dirty="0"/>
-              <a:t>ファイル操作</a:t>
+              <a:t>修飾子</a:t>
             </a:r>
             <a:endParaRPr kumimoji="1" lang="ja-JP" altLang="en-US" sz="3200" b="1" u="sng" dirty="0"/>
           </a:p>
@@ -4115,7 +3864,7 @@
         <p:spPr>
           <a:xfrm>
             <a:off x="567542" y="1189161"/>
-            <a:ext cx="4956806" cy="461665"/>
+            <a:ext cx="4033476" cy="461665"/>
           </a:xfrm>
           <a:prstGeom prst="rect">
             <a:avLst/>
@@ -4138,7 +3887,7 @@
             </a:r>
             <a:r>
               <a:rPr lang="ja-JP" altLang="en-US" sz="2400" dirty="0"/>
-              <a:t>を書きます。（その１）</a:t>
+              <a:t>を書きましょう。</a:t>
             </a:r>
             <a:endParaRPr lang="en-US" altLang="ja-JP" sz="2400" dirty="0"/>
           </a:p>
@@ -4149,7 +3898,7 @@
           <p:cNvPr id="3" name="図 2">
             <a:extLst>
               <a:ext uri="{FF2B5EF4-FFF2-40B4-BE49-F238E27FC236}">
-                <a16:creationId xmlns:a16="http://schemas.microsoft.com/office/drawing/2014/main" id="{DF85B0E7-48AC-4043-A47E-614AF24614B7}"/>
+                <a16:creationId xmlns:a16="http://schemas.microsoft.com/office/drawing/2014/main" id="{78531383-DAD2-4B41-A931-263B18F88A42}"/>
               </a:ext>
             </a:extLst>
           </p:cNvPr>
@@ -4167,7 +3916,7 @@
         <p:spPr>
           <a:xfrm>
             <a:off x="567542" y="1763258"/>
-            <a:ext cx="5002941" cy="4665361"/>
+            <a:ext cx="4874212" cy="4747609"/>
           </a:xfrm>
           <a:prstGeom prst="rect">
             <a:avLst/>
@@ -4177,7 +3926,7 @@
     </p:spTree>
     <p:extLst>
       <p:ext uri="{BB962C8B-B14F-4D97-AF65-F5344CB8AC3E}">
-        <p14:creationId xmlns:p14="http://schemas.microsoft.com/office/powerpoint/2010/main" val="2590721009"/>
+        <p14:creationId xmlns:p14="http://schemas.microsoft.com/office/powerpoint/2010/main" val="4044318111"/>
       </p:ext>
     </p:extLst>
   </p:cSld>
@@ -4219,7 +3968,7 @@
         <p:spPr>
           <a:xfrm>
             <a:off x="567542" y="491954"/>
-            <a:ext cx="2646878" cy="584775"/>
+            <a:ext cx="2513830" cy="584775"/>
           </a:xfrm>
           <a:prstGeom prst="rect">
             <a:avLst/>
@@ -4233,8 +3982,12 @@
           <a:lstStyle/>
           <a:p>
             <a:r>
+              <a:rPr lang="en-US" altLang="ja-JP" sz="3200" b="1" u="sng" dirty="0"/>
+              <a:t>const</a:t>
+            </a:r>
+            <a:r>
               <a:rPr lang="ja-JP" altLang="en-US" sz="3200" b="1" u="sng" dirty="0"/>
-              <a:t>ファイル操作</a:t>
+              <a:t>修飾子</a:t>
             </a:r>
             <a:endParaRPr kumimoji="1" lang="ja-JP" altLang="en-US" sz="3200" b="1" u="sng" dirty="0"/>
           </a:p>
@@ -4255,7 +4008,7 @@
         <p:spPr>
           <a:xfrm>
             <a:off x="567542" y="1189161"/>
-            <a:ext cx="4956806" cy="461665"/>
+            <a:ext cx="6647974" cy="830997"/>
           </a:xfrm>
           <a:prstGeom prst="rect">
             <a:avLst/>
@@ -4269,18 +4022,53 @@
           <a:lstStyle/>
           <a:p>
             <a:r>
+              <a:rPr lang="ja-JP" altLang="en-US" sz="2400" dirty="0"/>
+              <a:t>宣言時に</a:t>
+            </a:r>
+            <a:r>
               <a:rPr lang="en-US" altLang="ja-JP" sz="2400" b="1" dirty="0">
+                <a:solidFill>
+                  <a:srgbClr val="0070C0"/>
+                </a:solidFill>
+              </a:rPr>
+              <a:t>const</a:t>
+            </a:r>
+            <a:r>
+              <a:rPr lang="ja-JP" altLang="en-US" sz="2400" dirty="0"/>
+              <a:t>と書くと</a:t>
+            </a:r>
+            <a:r>
+              <a:rPr lang="ja-JP" altLang="en-US" sz="2400" b="1" dirty="0">
                 <a:solidFill>
                   <a:srgbClr val="FF0000"/>
                 </a:solidFill>
               </a:rPr>
-              <a:t>Main.cpp</a:t>
+              <a:t>定数</a:t>
             </a:r>
             <a:r>
               <a:rPr lang="ja-JP" altLang="en-US" sz="2400" dirty="0"/>
-              <a:t>を書きます。（その２）</a:t>
+              <a:t>を宣言できます。</a:t>
             </a:r>
             <a:endParaRPr lang="en-US" altLang="ja-JP" sz="2400" dirty="0"/>
+          </a:p>
+          <a:p>
+            <a:r>
+              <a:rPr lang="ja-JP" altLang="en-US" sz="2400" dirty="0"/>
+              <a:t>定数は</a:t>
+            </a:r>
+            <a:r>
+              <a:rPr lang="ja-JP" altLang="en-US" sz="2400" b="1" dirty="0">
+                <a:solidFill>
+                  <a:srgbClr val="FF0000"/>
+                </a:solidFill>
+              </a:rPr>
+              <a:t>宣言後に変更することができません。</a:t>
+            </a:r>
+            <a:endParaRPr lang="en-US" altLang="ja-JP" sz="2400" b="1" dirty="0">
+              <a:solidFill>
+                <a:srgbClr val="FF0000"/>
+              </a:solidFill>
+            </a:endParaRPr>
           </a:p>
         </p:txBody>
       </p:sp>
@@ -4289,7 +4077,7 @@
           <p:cNvPr id="5" name="図 4">
             <a:extLst>
               <a:ext uri="{FF2B5EF4-FFF2-40B4-BE49-F238E27FC236}">
-                <a16:creationId xmlns:a16="http://schemas.microsoft.com/office/drawing/2014/main" id="{C65C840A-D165-4AEA-A20D-72D64694D88C}"/>
+                <a16:creationId xmlns:a16="http://schemas.microsoft.com/office/drawing/2014/main" id="{6DAD07C6-A414-48E9-AA70-8DA68F3A73B9}"/>
               </a:ext>
             </a:extLst>
           </p:cNvPr>
@@ -4306,18 +4094,81 @@
         </p:blipFill>
         <p:spPr>
           <a:xfrm>
-            <a:off x="567541" y="1763258"/>
-            <a:ext cx="10209493" cy="2735170"/>
+            <a:off x="567542" y="2132590"/>
+            <a:ext cx="5941329" cy="2600277"/>
           </a:xfrm>
           <a:prstGeom prst="rect">
             <a:avLst/>
           </a:prstGeom>
         </p:spPr>
       </p:pic>
+      <p:sp>
+        <p:nvSpPr>
+          <p:cNvPr id="7" name="テキスト ボックス 6">
+            <a:extLst>
+              <a:ext uri="{FF2B5EF4-FFF2-40B4-BE49-F238E27FC236}">
+                <a16:creationId xmlns:a16="http://schemas.microsoft.com/office/drawing/2014/main" id="{C72B2177-7C5C-4CC6-9453-F5FB0E4EA91C}"/>
+              </a:ext>
+            </a:extLst>
+          </p:cNvPr>
+          <p:cNvSpPr txBox="1"/>
+          <p:nvPr/>
+        </p:nvSpPr>
+        <p:spPr>
+          <a:xfrm>
+            <a:off x="567542" y="4845299"/>
+            <a:ext cx="10033516" cy="830997"/>
+          </a:xfrm>
+          <a:prstGeom prst="rect">
+            <a:avLst/>
+          </a:prstGeom>
+          <a:noFill/>
+        </p:spPr>
+        <p:txBody>
+          <a:bodyPr wrap="none" rtlCol="0">
+            <a:spAutoFit/>
+          </a:bodyPr>
+          <a:lstStyle/>
+          <a:p>
+            <a:r>
+              <a:rPr lang="ja-JP" altLang="en-US" sz="2400" dirty="0"/>
+              <a:t>ゲーム制作では初期座標など</a:t>
+            </a:r>
+            <a:r>
+              <a:rPr lang="ja-JP" altLang="en-US" sz="2400" b="1" dirty="0">
+                <a:solidFill>
+                  <a:srgbClr val="FF0000"/>
+                </a:solidFill>
+              </a:rPr>
+              <a:t>最初から決まっている数</a:t>
+            </a:r>
+            <a:r>
+              <a:rPr lang="ja-JP" altLang="en-US" sz="2400" dirty="0"/>
+              <a:t>に使いましょう。</a:t>
+            </a:r>
+            <a:endParaRPr lang="en-US" altLang="ja-JP" sz="2400" dirty="0"/>
+          </a:p>
+          <a:p>
+            <a:r>
+              <a:rPr lang="ja-JP" altLang="en-US" sz="2400" dirty="0"/>
+              <a:t>（</a:t>
+            </a:r>
+            <a:r>
+              <a:rPr lang="en-US" altLang="ja-JP" sz="2400" dirty="0"/>
+              <a:t>#define</a:t>
+            </a:r>
+            <a:r>
+              <a:rPr lang="ja-JP" altLang="en-US" sz="2400" dirty="0"/>
+              <a:t>でもいいです）</a:t>
+            </a:r>
+            <a:endParaRPr lang="en-US" altLang="ja-JP" sz="2400" dirty="0"/>
+          </a:p>
+        </p:txBody>
+      </p:sp>
     </p:spTree>
     <p:extLst>
       <p:ext uri="{BB962C8B-B14F-4D97-AF65-F5344CB8AC3E}">
-        <p14:creationId xmlns:p14="http://schemas.microsoft.com/office/powerpoint/2010/main" val="3242392432"/>
+        <p14:creationId xmlns:p14="http://schemas.microsoft.com/office/powerpoint/2010/main" val="1538710717"/>
       </p:ext>
     </p:extLst>
   </p:cSld>
@@ -4359,7 +4210,7 @@
         <p:spPr>
           <a:xfrm>
             <a:off x="567542" y="491954"/>
-            <a:ext cx="2646878" cy="584775"/>
+            <a:ext cx="2513830" cy="584775"/>
           </a:xfrm>
           <a:prstGeom prst="rect">
             <a:avLst/>
@@ -4373,8 +4224,12 @@
           <a:lstStyle/>
           <a:p>
             <a:r>
+              <a:rPr lang="en-US" altLang="ja-JP" sz="3200" b="1" u="sng" dirty="0"/>
+              <a:t>const</a:t>
+            </a:r>
+            <a:r>
               <a:rPr lang="ja-JP" altLang="en-US" sz="3200" b="1" u="sng" dirty="0"/>
-              <a:t>ファイル操作</a:t>
+              <a:t>修飾子</a:t>
             </a:r>
             <a:endParaRPr kumimoji="1" lang="ja-JP" altLang="en-US" sz="3200" b="1" u="sng" dirty="0"/>
           </a:p>
@@ -4395,7 +4250,7 @@
         <p:spPr>
           <a:xfrm>
             <a:off x="567542" y="1189161"/>
-            <a:ext cx="8494633" cy="830997"/>
+            <a:ext cx="6803466" cy="461665"/>
           </a:xfrm>
           <a:prstGeom prst="rect">
             <a:avLst/>
@@ -4410,14 +4265,7 @@
           <a:p>
             <a:r>
               <a:rPr lang="ja-JP" altLang="en-US" sz="2400" dirty="0"/>
-              <a:t>実行する前にまずはファイルの置き場所を用意しましょう。</a:t>
-            </a:r>
-            <a:endParaRPr lang="en-US" altLang="ja-JP" sz="2400" dirty="0"/>
-          </a:p>
-          <a:p>
-            <a:r>
-              <a:rPr lang="ja-JP" altLang="en-US" sz="2400" dirty="0"/>
-              <a:t>プロジェクト内に</a:t>
+              <a:t>別プロジェクトを作成し</a:t>
             </a:r>
             <a:r>
               <a:rPr lang="en-US" altLang="ja-JP" sz="2400" b="1" dirty="0">
@@ -4425,1163 +4273,11 @@
                   <a:srgbClr val="FF0000"/>
                 </a:solidFill>
               </a:rPr>
-              <a:t>Data</a:t>
-            </a:r>
-            <a:r>
-              <a:rPr lang="ja-JP" altLang="en-US" sz="2400" b="1" dirty="0">
-                <a:solidFill>
-                  <a:srgbClr val="FF0000"/>
-                </a:solidFill>
-              </a:rPr>
-              <a:t>フォルダ</a:t>
+              <a:t>Main.cpp</a:t>
             </a:r>
             <a:r>
               <a:rPr lang="ja-JP" altLang="en-US" sz="2400" dirty="0"/>
-              <a:t>を追加します。</a:t>
-            </a:r>
-            <a:endParaRPr lang="en-US" altLang="ja-JP" sz="2400" dirty="0"/>
-          </a:p>
-        </p:txBody>
-      </p:sp>
-      <p:pic>
-        <p:nvPicPr>
-          <p:cNvPr id="3" name="図 2">
-            <a:extLst>
-              <a:ext uri="{FF2B5EF4-FFF2-40B4-BE49-F238E27FC236}">
-                <a16:creationId xmlns:a16="http://schemas.microsoft.com/office/drawing/2014/main" id="{F52C39DC-5024-4C1F-A488-217C9113BAE7}"/>
-              </a:ext>
-            </a:extLst>
-          </p:cNvPr>
-          <p:cNvPicPr>
-            <a:picLocks noChangeAspect="1"/>
-          </p:cNvPicPr>
-          <p:nvPr/>
-        </p:nvPicPr>
-        <p:blipFill>
-          <a:blip r:embed="rId2"/>
-          <a:stretch>
-            <a:fillRect/>
-          </a:stretch>
-        </p:blipFill>
-        <p:spPr>
-          <a:xfrm>
-            <a:off x="567541" y="2132590"/>
-            <a:ext cx="3700573" cy="4233456"/>
-          </a:xfrm>
-          <a:prstGeom prst="rect">
-            <a:avLst/>
-          </a:prstGeom>
-        </p:spPr>
-      </p:pic>
-      <p:sp>
-        <p:nvSpPr>
-          <p:cNvPr id="6" name="矢印: 右 5">
-            <a:extLst>
-              <a:ext uri="{FF2B5EF4-FFF2-40B4-BE49-F238E27FC236}">
-                <a16:creationId xmlns:a16="http://schemas.microsoft.com/office/drawing/2014/main" id="{7EAD1E60-0814-4F4E-96CB-B96FCAE2F1DD}"/>
-              </a:ext>
-            </a:extLst>
-          </p:cNvPr>
-          <p:cNvSpPr/>
-          <p:nvPr/>
-        </p:nvSpPr>
-        <p:spPr>
-          <a:xfrm rot="8008218">
-            <a:off x="1376855" y="2579617"/>
-            <a:ext cx="672662" cy="451945"/>
-          </a:xfrm>
-          <a:prstGeom prst="rightArrow">
-            <a:avLst/>
-          </a:prstGeom>
-          <a:solidFill>
-            <a:srgbClr val="FF0000"/>
-          </a:solidFill>
-          <a:ln>
-            <a:solidFill>
-              <a:schemeClr val="tx1"/>
-            </a:solidFill>
-          </a:ln>
-        </p:spPr>
-        <p:style>
-          <a:lnRef idx="2">
-            <a:schemeClr val="accent1">
-              <a:shade val="50000"/>
-            </a:schemeClr>
-          </a:lnRef>
-          <a:fillRef idx="1">
-            <a:schemeClr val="accent1"/>
-          </a:fillRef>
-          <a:effectRef idx="0">
-            <a:schemeClr val="accent1"/>
-          </a:effectRef>
-          <a:fontRef idx="minor">
-            <a:schemeClr val="lt1"/>
-          </a:fontRef>
-        </p:style>
-        <p:txBody>
-          <a:bodyPr rtlCol="0" anchor="ctr"/>
-          <a:lstStyle/>
-          <a:p>
-            <a:pPr algn="ctr"/>
-            <a:endParaRPr kumimoji="1" lang="ja-JP" altLang="en-US"/>
-          </a:p>
-        </p:txBody>
-      </p:sp>
-    </p:spTree>
-    <p:extLst>
-      <p:ext uri="{BB962C8B-B14F-4D97-AF65-F5344CB8AC3E}">
-        <p14:creationId xmlns:p14="http://schemas.microsoft.com/office/powerpoint/2010/main" val="4283430050"/>
-      </p:ext>
-    </p:extLst>
-  </p:cSld>
-  <p:clrMapOvr>
-    <a:masterClrMapping/>
-  </p:clrMapOvr>
-</p:sld>
-</file>
-
-<file path=ppt/slides/slide5.xml><?xml version="1.0" encoding="utf-8"?>
-<p:sld xmlns:a="http://schemas.openxmlformats.org/drawingml/2006/main" xmlns:r="http://schemas.openxmlformats.org/officeDocument/2006/relationships" xmlns:p="http://schemas.openxmlformats.org/presentationml/2006/main">
-  <p:cSld>
-    <p:spTree>
-      <p:nvGrpSpPr>
-        <p:cNvPr id="1" name=""/>
-        <p:cNvGrpSpPr/>
-        <p:nvPr/>
-      </p:nvGrpSpPr>
-      <p:grpSpPr>
-        <a:xfrm>
-          <a:off x="0" y="0"/>
-          <a:ext cx="0" cy="0"/>
-          <a:chOff x="0" y="0"/>
-          <a:chExt cx="0" cy="0"/>
-        </a:xfrm>
-      </p:grpSpPr>
-      <p:sp>
-        <p:nvSpPr>
-          <p:cNvPr id="4" name="テキスト ボックス 3">
-            <a:extLst>
-              <a:ext uri="{FF2B5EF4-FFF2-40B4-BE49-F238E27FC236}">
-                <a16:creationId xmlns:a16="http://schemas.microsoft.com/office/drawing/2014/main" id="{5A13BF46-B8C5-48AA-8308-C9ECFF431A18}"/>
-              </a:ext>
-            </a:extLst>
-          </p:cNvPr>
-          <p:cNvSpPr txBox="1"/>
-          <p:nvPr/>
-        </p:nvSpPr>
-        <p:spPr>
-          <a:xfrm>
-            <a:off x="567542" y="491954"/>
-            <a:ext cx="2646878" cy="584775"/>
-          </a:xfrm>
-          <a:prstGeom prst="rect">
-            <a:avLst/>
-          </a:prstGeom>
-          <a:noFill/>
-        </p:spPr>
-        <p:txBody>
-          <a:bodyPr wrap="none" rtlCol="0">
-            <a:spAutoFit/>
-          </a:bodyPr>
-          <a:lstStyle/>
-          <a:p>
-            <a:r>
-              <a:rPr lang="ja-JP" altLang="en-US" sz="3200" b="1" u="sng" dirty="0"/>
-              <a:t>ファイル操作</a:t>
-            </a:r>
-            <a:endParaRPr kumimoji="1" lang="ja-JP" altLang="en-US" sz="3200" b="1" u="sng" dirty="0"/>
-          </a:p>
-        </p:txBody>
-      </p:sp>
-      <p:sp>
-        <p:nvSpPr>
-          <p:cNvPr id="9" name="テキスト ボックス 8">
-            <a:extLst>
-              <a:ext uri="{FF2B5EF4-FFF2-40B4-BE49-F238E27FC236}">
-                <a16:creationId xmlns:a16="http://schemas.microsoft.com/office/drawing/2014/main" id="{80F412F9-EC22-472D-8334-55F86CA5630B}"/>
-              </a:ext>
-            </a:extLst>
-          </p:cNvPr>
-          <p:cNvSpPr txBox="1"/>
-          <p:nvPr/>
-        </p:nvSpPr>
-        <p:spPr>
-          <a:xfrm>
-            <a:off x="567542" y="1189161"/>
-            <a:ext cx="7444667" cy="461665"/>
-          </a:xfrm>
-          <a:prstGeom prst="rect">
-            <a:avLst/>
-          </a:prstGeom>
-          <a:noFill/>
-        </p:spPr>
-        <p:txBody>
-          <a:bodyPr wrap="none" rtlCol="0">
-            <a:spAutoFit/>
-          </a:bodyPr>
-          <a:lstStyle/>
-          <a:p>
-            <a:r>
-              <a:rPr lang="ja-JP" altLang="en-US" sz="2400" dirty="0"/>
-              <a:t>実行すると「</a:t>
-            </a:r>
-            <a:r>
-              <a:rPr lang="en-US" altLang="ja-JP" sz="2400" b="1" dirty="0" err="1">
-                <a:solidFill>
-                  <a:srgbClr val="FF0000"/>
-                </a:solidFill>
-              </a:rPr>
-              <a:t>Score.bin</a:t>
-            </a:r>
-            <a:r>
-              <a:rPr lang="ja-JP" altLang="en-US" sz="2400" dirty="0"/>
-              <a:t>」ファイルが作成されます。</a:t>
-            </a:r>
-            <a:endParaRPr lang="en-US" altLang="ja-JP" sz="2400" dirty="0"/>
-          </a:p>
-        </p:txBody>
-      </p:sp>
-      <p:pic>
-        <p:nvPicPr>
-          <p:cNvPr id="5" name="図 4">
-            <a:extLst>
-              <a:ext uri="{FF2B5EF4-FFF2-40B4-BE49-F238E27FC236}">
-                <a16:creationId xmlns:a16="http://schemas.microsoft.com/office/drawing/2014/main" id="{BAAD68CC-8C59-4E00-81F2-8E445007FD29}"/>
-              </a:ext>
-            </a:extLst>
-          </p:cNvPr>
-          <p:cNvPicPr>
-            <a:picLocks noChangeAspect="1"/>
-          </p:cNvPicPr>
-          <p:nvPr/>
-        </p:nvPicPr>
-        <p:blipFill>
-          <a:blip r:embed="rId2"/>
-          <a:stretch>
-            <a:fillRect/>
-          </a:stretch>
-        </p:blipFill>
-        <p:spPr>
-          <a:xfrm>
-            <a:off x="567542" y="1763257"/>
-            <a:ext cx="4930380" cy="1505459"/>
-          </a:xfrm>
-          <a:prstGeom prst="rect">
-            <a:avLst/>
-          </a:prstGeom>
-        </p:spPr>
-      </p:pic>
-    </p:spTree>
-    <p:extLst>
-      <p:ext uri="{BB962C8B-B14F-4D97-AF65-F5344CB8AC3E}">
-        <p14:creationId xmlns:p14="http://schemas.microsoft.com/office/powerpoint/2010/main" val="4267490096"/>
-      </p:ext>
-    </p:extLst>
-  </p:cSld>
-  <p:clrMapOvr>
-    <a:masterClrMapping/>
-  </p:clrMapOvr>
-</p:sld>
-</file>
-
-<file path=ppt/slides/slide6.xml><?xml version="1.0" encoding="utf-8"?>
-<p:sld xmlns:a="http://schemas.openxmlformats.org/drawingml/2006/main" xmlns:r="http://schemas.openxmlformats.org/officeDocument/2006/relationships" xmlns:p="http://schemas.openxmlformats.org/presentationml/2006/main">
-  <p:cSld>
-    <p:spTree>
-      <p:nvGrpSpPr>
-        <p:cNvPr id="1" name=""/>
-        <p:cNvGrpSpPr/>
-        <p:nvPr/>
-      </p:nvGrpSpPr>
-      <p:grpSpPr>
-        <a:xfrm>
-          <a:off x="0" y="0"/>
-          <a:ext cx="0" cy="0"/>
-          <a:chOff x="0" y="0"/>
-          <a:chExt cx="0" cy="0"/>
-        </a:xfrm>
-      </p:grpSpPr>
-      <p:sp>
-        <p:nvSpPr>
-          <p:cNvPr id="4" name="テキスト ボックス 3">
-            <a:extLst>
-              <a:ext uri="{FF2B5EF4-FFF2-40B4-BE49-F238E27FC236}">
-                <a16:creationId xmlns:a16="http://schemas.microsoft.com/office/drawing/2014/main" id="{5A13BF46-B8C5-48AA-8308-C9ECFF431A18}"/>
-              </a:ext>
-            </a:extLst>
-          </p:cNvPr>
-          <p:cNvSpPr txBox="1"/>
-          <p:nvPr/>
-        </p:nvSpPr>
-        <p:spPr>
-          <a:xfrm>
-            <a:off x="567542" y="491954"/>
-            <a:ext cx="2646878" cy="584775"/>
-          </a:xfrm>
-          <a:prstGeom prst="rect">
-            <a:avLst/>
-          </a:prstGeom>
-          <a:noFill/>
-        </p:spPr>
-        <p:txBody>
-          <a:bodyPr wrap="none" rtlCol="0">
-            <a:spAutoFit/>
-          </a:bodyPr>
-          <a:lstStyle/>
-          <a:p>
-            <a:r>
-              <a:rPr lang="ja-JP" altLang="en-US" sz="3200" b="1" u="sng" dirty="0"/>
-              <a:t>ファイル操作</a:t>
-            </a:r>
-            <a:endParaRPr kumimoji="1" lang="ja-JP" altLang="en-US" sz="3200" b="1" u="sng" dirty="0"/>
-          </a:p>
-        </p:txBody>
-      </p:sp>
-      <p:sp>
-        <p:nvSpPr>
-          <p:cNvPr id="9" name="テキスト ボックス 8">
-            <a:extLst>
-              <a:ext uri="{FF2B5EF4-FFF2-40B4-BE49-F238E27FC236}">
-                <a16:creationId xmlns:a16="http://schemas.microsoft.com/office/drawing/2014/main" id="{80F412F9-EC22-472D-8334-55F86CA5630B}"/>
-              </a:ext>
-            </a:extLst>
-          </p:cNvPr>
-          <p:cNvSpPr txBox="1"/>
-          <p:nvPr/>
-        </p:nvSpPr>
-        <p:spPr>
-          <a:xfrm>
-            <a:off x="567542" y="1189161"/>
-            <a:ext cx="10649069" cy="830997"/>
-          </a:xfrm>
-          <a:prstGeom prst="rect">
-            <a:avLst/>
-          </a:prstGeom>
-          <a:noFill/>
-        </p:spPr>
-        <p:txBody>
-          <a:bodyPr wrap="none" rtlCol="0">
-            <a:spAutoFit/>
-          </a:bodyPr>
-          <a:lstStyle/>
-          <a:p>
-            <a:r>
-              <a:rPr lang="ja-JP" altLang="en-US" sz="2400" dirty="0"/>
-              <a:t>ファイル操作をするためには、まず</a:t>
-            </a:r>
-            <a:r>
-              <a:rPr lang="ja-JP" altLang="en-US" sz="2400" b="1" dirty="0">
-                <a:solidFill>
-                  <a:srgbClr val="FF0000"/>
-                </a:solidFill>
-              </a:rPr>
-              <a:t>専用のファイルポインタ</a:t>
-            </a:r>
-            <a:r>
-              <a:rPr lang="ja-JP" altLang="en-US" sz="2400" dirty="0"/>
-              <a:t>を用意します。</a:t>
-            </a:r>
-            <a:endParaRPr lang="en-US" altLang="ja-JP" sz="2400" dirty="0"/>
-          </a:p>
-          <a:p>
-            <a:r>
-              <a:rPr lang="ja-JP" altLang="en-US" sz="2400" dirty="0"/>
-              <a:t>このファイルポインタを使って様々な処理を行います。</a:t>
-            </a:r>
-            <a:endParaRPr lang="en-US" altLang="ja-JP" sz="2400" dirty="0"/>
-          </a:p>
-        </p:txBody>
-      </p:sp>
-      <p:pic>
-        <p:nvPicPr>
-          <p:cNvPr id="3" name="図 2">
-            <a:extLst>
-              <a:ext uri="{FF2B5EF4-FFF2-40B4-BE49-F238E27FC236}">
-                <a16:creationId xmlns:a16="http://schemas.microsoft.com/office/drawing/2014/main" id="{262B46DB-D2C2-490B-915A-96614E01A33A}"/>
-              </a:ext>
-            </a:extLst>
-          </p:cNvPr>
-          <p:cNvPicPr>
-            <a:picLocks noChangeAspect="1"/>
-          </p:cNvPicPr>
-          <p:nvPr/>
-        </p:nvPicPr>
-        <p:blipFill>
-          <a:blip r:embed="rId2"/>
-          <a:stretch>
-            <a:fillRect/>
-          </a:stretch>
-        </p:blipFill>
-        <p:spPr>
-          <a:xfrm>
-            <a:off x="567542" y="2132589"/>
-            <a:ext cx="7412501" cy="830997"/>
-          </a:xfrm>
-          <a:prstGeom prst="rect">
-            <a:avLst/>
-          </a:prstGeom>
-        </p:spPr>
-      </p:pic>
-    </p:spTree>
-    <p:extLst>
-      <p:ext uri="{BB962C8B-B14F-4D97-AF65-F5344CB8AC3E}">
-        <p14:creationId xmlns:p14="http://schemas.microsoft.com/office/powerpoint/2010/main" val="2891940613"/>
-      </p:ext>
-    </p:extLst>
-  </p:cSld>
-  <p:clrMapOvr>
-    <a:masterClrMapping/>
-  </p:clrMapOvr>
-</p:sld>
-</file>
-
-<file path=ppt/slides/slide7.xml><?xml version="1.0" encoding="utf-8"?>
-<p:sld xmlns:a="http://schemas.openxmlformats.org/drawingml/2006/main" xmlns:r="http://schemas.openxmlformats.org/officeDocument/2006/relationships" xmlns:p="http://schemas.openxmlformats.org/presentationml/2006/main">
-  <p:cSld>
-    <p:spTree>
-      <p:nvGrpSpPr>
-        <p:cNvPr id="1" name=""/>
-        <p:cNvGrpSpPr/>
-        <p:nvPr/>
-      </p:nvGrpSpPr>
-      <p:grpSpPr>
-        <a:xfrm>
-          <a:off x="0" y="0"/>
-          <a:ext cx="0" cy="0"/>
-          <a:chOff x="0" y="0"/>
-          <a:chExt cx="0" cy="0"/>
-        </a:xfrm>
-      </p:grpSpPr>
-      <p:sp>
-        <p:nvSpPr>
-          <p:cNvPr id="4" name="テキスト ボックス 3">
-            <a:extLst>
-              <a:ext uri="{FF2B5EF4-FFF2-40B4-BE49-F238E27FC236}">
-                <a16:creationId xmlns:a16="http://schemas.microsoft.com/office/drawing/2014/main" id="{5A13BF46-B8C5-48AA-8308-C9ECFF431A18}"/>
-              </a:ext>
-            </a:extLst>
-          </p:cNvPr>
-          <p:cNvSpPr txBox="1"/>
-          <p:nvPr/>
-        </p:nvSpPr>
-        <p:spPr>
-          <a:xfrm>
-            <a:off x="567542" y="491954"/>
-            <a:ext cx="2646878" cy="584775"/>
-          </a:xfrm>
-          <a:prstGeom prst="rect">
-            <a:avLst/>
-          </a:prstGeom>
-          <a:noFill/>
-        </p:spPr>
-        <p:txBody>
-          <a:bodyPr wrap="none" rtlCol="0">
-            <a:spAutoFit/>
-          </a:bodyPr>
-          <a:lstStyle/>
-          <a:p>
-            <a:r>
-              <a:rPr lang="ja-JP" altLang="en-US" sz="3200" b="1" u="sng" dirty="0"/>
-              <a:t>ファイル操作</a:t>
-            </a:r>
-            <a:endParaRPr kumimoji="1" lang="ja-JP" altLang="en-US" sz="3200" b="1" u="sng" dirty="0"/>
-          </a:p>
-        </p:txBody>
-      </p:sp>
-      <p:sp>
-        <p:nvSpPr>
-          <p:cNvPr id="9" name="テキスト ボックス 8">
-            <a:extLst>
-              <a:ext uri="{FF2B5EF4-FFF2-40B4-BE49-F238E27FC236}">
-                <a16:creationId xmlns:a16="http://schemas.microsoft.com/office/drawing/2014/main" id="{80F412F9-EC22-472D-8334-55F86CA5630B}"/>
-              </a:ext>
-            </a:extLst>
-          </p:cNvPr>
-          <p:cNvSpPr txBox="1"/>
-          <p:nvPr/>
-        </p:nvSpPr>
-        <p:spPr>
-          <a:xfrm>
-            <a:off x="567542" y="1189161"/>
-            <a:ext cx="8494633" cy="830997"/>
-          </a:xfrm>
-          <a:prstGeom prst="rect">
-            <a:avLst/>
-          </a:prstGeom>
-          <a:noFill/>
-        </p:spPr>
-        <p:txBody>
-          <a:bodyPr wrap="none" rtlCol="0">
-            <a:spAutoFit/>
-          </a:bodyPr>
-          <a:lstStyle/>
-          <a:p>
-            <a:r>
-              <a:rPr lang="ja-JP" altLang="en-US" sz="2400" dirty="0"/>
-              <a:t>ファイルは</a:t>
-            </a:r>
-            <a:r>
-              <a:rPr lang="en-US" altLang="ja-JP" sz="2400" b="1" dirty="0" err="1">
-                <a:solidFill>
-                  <a:srgbClr val="FF0000"/>
-                </a:solidFill>
-              </a:rPr>
-              <a:t>fopen_s</a:t>
-            </a:r>
-            <a:r>
-              <a:rPr lang="ja-JP" altLang="en-US" sz="2400" b="1" dirty="0">
-                <a:solidFill>
-                  <a:srgbClr val="FF0000"/>
-                </a:solidFill>
-              </a:rPr>
-              <a:t>関数で開く</a:t>
-            </a:r>
-            <a:r>
-              <a:rPr lang="ja-JP" altLang="en-US" sz="2400" dirty="0"/>
-              <a:t>ことができます。</a:t>
-            </a:r>
-            <a:endParaRPr lang="en-US" altLang="ja-JP" sz="2400" dirty="0"/>
-          </a:p>
-          <a:p>
-            <a:r>
-              <a:rPr lang="ja-JP" altLang="en-US" sz="2400" dirty="0"/>
-              <a:t>ただし、ファイルを開くにはいくつか</a:t>
-            </a:r>
-            <a:r>
-              <a:rPr lang="ja-JP" altLang="en-US" sz="2400" b="1" dirty="0">
-                <a:solidFill>
-                  <a:srgbClr val="FF0000"/>
-                </a:solidFill>
-              </a:rPr>
-              <a:t>モード</a:t>
-            </a:r>
-            <a:r>
-              <a:rPr lang="ja-JP" altLang="en-US" sz="2400" dirty="0"/>
-              <a:t>が存在します。</a:t>
-            </a:r>
-            <a:endParaRPr lang="en-US" altLang="ja-JP" sz="2400" dirty="0"/>
-          </a:p>
-        </p:txBody>
-      </p:sp>
-      <p:pic>
-        <p:nvPicPr>
-          <p:cNvPr id="5" name="図 4">
-            <a:extLst>
-              <a:ext uri="{FF2B5EF4-FFF2-40B4-BE49-F238E27FC236}">
-                <a16:creationId xmlns:a16="http://schemas.microsoft.com/office/drawing/2014/main" id="{425E61D6-EB8F-46D6-A642-49E080B0743C}"/>
-              </a:ext>
-            </a:extLst>
-          </p:cNvPr>
-          <p:cNvPicPr>
-            <a:picLocks noChangeAspect="1"/>
-          </p:cNvPicPr>
-          <p:nvPr/>
-        </p:nvPicPr>
-        <p:blipFill>
-          <a:blip r:embed="rId2"/>
-          <a:stretch>
-            <a:fillRect/>
-          </a:stretch>
-        </p:blipFill>
-        <p:spPr>
-          <a:xfrm>
-            <a:off x="567542" y="2132590"/>
-            <a:ext cx="9970463" cy="736734"/>
-          </a:xfrm>
-          <a:prstGeom prst="rect">
-            <a:avLst/>
-          </a:prstGeom>
-        </p:spPr>
-      </p:pic>
-      <p:graphicFrame>
-        <p:nvGraphicFramePr>
-          <p:cNvPr id="6" name="表 6">
-            <a:extLst>
-              <a:ext uri="{FF2B5EF4-FFF2-40B4-BE49-F238E27FC236}">
-                <a16:creationId xmlns:a16="http://schemas.microsoft.com/office/drawing/2014/main" id="{C3B2EB66-1695-4051-ABBD-623316BB71A7}"/>
-              </a:ext>
-            </a:extLst>
-          </p:cNvPr>
-          <p:cNvGraphicFramePr>
-            <a:graphicFrameLocks noGrp="1"/>
-          </p:cNvGraphicFramePr>
-          <p:nvPr>
-            <p:extLst>
-              <p:ext uri="{D42A27DB-BD31-4B8C-83A1-F6EECF244321}">
-                <p14:modId xmlns:p14="http://schemas.microsoft.com/office/powerpoint/2010/main" val="853700788"/>
-              </p:ext>
-            </p:extLst>
-          </p:nvPr>
-        </p:nvGraphicFramePr>
-        <p:xfrm>
-          <a:off x="567541" y="3174124"/>
-          <a:ext cx="10689039" cy="2926080"/>
-        </p:xfrm>
-        <a:graphic>
-          <a:graphicData uri="http://schemas.openxmlformats.org/drawingml/2006/table">
-            <a:tbl>
-              <a:tblPr firstRow="1" bandRow="1">
-                <a:tableStyleId>{5C22544A-7EE6-4342-B048-85BDC9FD1C3A}</a:tableStyleId>
-              </a:tblPr>
-              <a:tblGrid>
-                <a:gridCol w="1171873">
-                  <a:extLst>
-                    <a:ext uri="{9D8B030D-6E8A-4147-A177-3AD203B41FA5}">
-                      <a16:colId xmlns:a16="http://schemas.microsoft.com/office/drawing/2014/main" val="2358469219"/>
-                    </a:ext>
-                  </a:extLst>
-                </a:gridCol>
-                <a:gridCol w="2811565">
-                  <a:extLst>
-                    <a:ext uri="{9D8B030D-6E8A-4147-A177-3AD203B41FA5}">
-                      <a16:colId xmlns:a16="http://schemas.microsoft.com/office/drawing/2014/main" val="100629930"/>
-                    </a:ext>
-                  </a:extLst>
-                </a:gridCol>
-                <a:gridCol w="6705601">
-                  <a:extLst>
-                    <a:ext uri="{9D8B030D-6E8A-4147-A177-3AD203B41FA5}">
-                      <a16:colId xmlns:a16="http://schemas.microsoft.com/office/drawing/2014/main" val="155727674"/>
-                    </a:ext>
-                  </a:extLst>
-                </a:gridCol>
-              </a:tblGrid>
-              <a:tr h="258293">
-                <a:tc>
-                  <a:txBody>
-                    <a:bodyPr/>
-                    <a:lstStyle/>
-                    <a:p>
-                      <a:r>
-                        <a:rPr kumimoji="1" lang="ja-JP" altLang="en-US" dirty="0"/>
-                        <a:t>モード</a:t>
-                      </a:r>
-                    </a:p>
-                  </a:txBody>
-                  <a:tcPr/>
-                </a:tc>
-                <a:tc>
-                  <a:txBody>
-                    <a:bodyPr/>
-                    <a:lstStyle/>
-                    <a:p>
-                      <a:r>
-                        <a:rPr kumimoji="1" lang="ja-JP" altLang="en-US" dirty="0"/>
-                        <a:t>内容</a:t>
-                      </a:r>
-                    </a:p>
-                  </a:txBody>
-                  <a:tcPr/>
-                </a:tc>
-                <a:tc>
-                  <a:txBody>
-                    <a:bodyPr/>
-                    <a:lstStyle/>
-                    <a:p>
-                      <a:r>
-                        <a:rPr kumimoji="1" lang="ja-JP" altLang="en-US" dirty="0"/>
-                        <a:t>詳細</a:t>
-                      </a:r>
-                    </a:p>
-                  </a:txBody>
-                  <a:tcPr/>
-                </a:tc>
-                <a:extLst>
-                  <a:ext uri="{0D108BD9-81ED-4DB2-BD59-A6C34878D82A}">
-                    <a16:rowId xmlns:a16="http://schemas.microsoft.com/office/drawing/2014/main" val="1317057868"/>
-                  </a:ext>
-                </a:extLst>
-              </a:tr>
-              <a:tr h="370840">
-                <a:tc>
-                  <a:txBody>
-                    <a:bodyPr/>
-                    <a:lstStyle/>
-                    <a:p>
-                      <a:r>
-                        <a:rPr kumimoji="1" lang="en-US" altLang="ja-JP" dirty="0"/>
-                        <a:t>“r”</a:t>
-                      </a:r>
-                      <a:endParaRPr kumimoji="1" lang="ja-JP" altLang="en-US" dirty="0"/>
-                    </a:p>
-                  </a:txBody>
-                  <a:tcPr/>
-                </a:tc>
-                <a:tc>
-                  <a:txBody>
-                    <a:bodyPr/>
-                    <a:lstStyle/>
-                    <a:p>
-                      <a:r>
-                        <a:rPr kumimoji="1" lang="ja-JP" altLang="en-US" dirty="0"/>
-                        <a:t>読み込みモード</a:t>
-                      </a:r>
-                    </a:p>
-                  </a:txBody>
-                  <a:tcPr/>
-                </a:tc>
-                <a:tc>
-                  <a:txBody>
-                    <a:bodyPr/>
-                    <a:lstStyle/>
-                    <a:p>
-                      <a:r>
-                        <a:rPr kumimoji="1" lang="ja-JP" altLang="en-US" dirty="0"/>
-                        <a:t>第２引数にあるファイルを読み込むために開く。</a:t>
-                      </a:r>
-                      <a:endParaRPr kumimoji="1" lang="en-US" altLang="ja-JP" dirty="0"/>
-                    </a:p>
-                    <a:p>
-                      <a:r>
-                        <a:rPr kumimoji="1" lang="ja-JP" altLang="en-US" dirty="0"/>
-                        <a:t>ファイルが存在しない場合はエラーが返却される。</a:t>
-                      </a:r>
-                    </a:p>
-                  </a:txBody>
-                  <a:tcPr/>
-                </a:tc>
-                <a:extLst>
-                  <a:ext uri="{0D108BD9-81ED-4DB2-BD59-A6C34878D82A}">
-                    <a16:rowId xmlns:a16="http://schemas.microsoft.com/office/drawing/2014/main" val="3650208368"/>
-                  </a:ext>
-                </a:extLst>
-              </a:tr>
-              <a:tr h="370840">
-                <a:tc>
-                  <a:txBody>
-                    <a:bodyPr/>
-                    <a:lstStyle/>
-                    <a:p>
-                      <a:r>
-                        <a:rPr kumimoji="1" lang="en-US" altLang="ja-JP" dirty="0"/>
-                        <a:t>“</a:t>
-                      </a:r>
-                      <a:r>
-                        <a:rPr kumimoji="1" lang="en-US" altLang="ja-JP" dirty="0" err="1"/>
-                        <a:t>rb</a:t>
-                      </a:r>
-                      <a:r>
-                        <a:rPr kumimoji="1" lang="en-US" altLang="ja-JP" dirty="0"/>
-                        <a:t>”</a:t>
-                      </a:r>
-                      <a:endParaRPr kumimoji="1" lang="ja-JP" altLang="en-US" dirty="0"/>
-                    </a:p>
-                  </a:txBody>
-                  <a:tcPr/>
-                </a:tc>
-                <a:tc>
-                  <a:txBody>
-                    <a:bodyPr/>
-                    <a:lstStyle/>
-                    <a:p>
-                      <a:r>
-                        <a:rPr kumimoji="1" lang="ja-JP" altLang="en-US" dirty="0"/>
-                        <a:t>バイナリ読み込みモード</a:t>
-                      </a:r>
-                    </a:p>
-                  </a:txBody>
-                  <a:tcPr/>
-                </a:tc>
-                <a:tc>
-                  <a:txBody>
-                    <a:bodyPr/>
-                    <a:lstStyle/>
-                    <a:p>
-                      <a:r>
-                        <a:rPr kumimoji="1" lang="ja-JP" altLang="en-US" dirty="0"/>
-                        <a:t>第２引数にあるファイルをバイナリで読み込むために開く</a:t>
-                      </a:r>
-                      <a:endParaRPr kumimoji="1" lang="en-US" altLang="ja-JP" dirty="0"/>
-                    </a:p>
-                    <a:p>
-                      <a:r>
-                        <a:rPr kumimoji="1" lang="ja-JP" altLang="en-US" dirty="0"/>
-                        <a:t>ファイルが存在しない場合はエラーが返却される。</a:t>
-                      </a:r>
-                    </a:p>
-                  </a:txBody>
-                  <a:tcPr/>
-                </a:tc>
-                <a:extLst>
-                  <a:ext uri="{0D108BD9-81ED-4DB2-BD59-A6C34878D82A}">
-                    <a16:rowId xmlns:a16="http://schemas.microsoft.com/office/drawing/2014/main" val="2766639625"/>
-                  </a:ext>
-                </a:extLst>
-              </a:tr>
-              <a:tr h="370840">
-                <a:tc>
-                  <a:txBody>
-                    <a:bodyPr/>
-                    <a:lstStyle/>
-                    <a:p>
-                      <a:r>
-                        <a:rPr kumimoji="1" lang="en-US" altLang="ja-JP" dirty="0"/>
-                        <a:t>“w”</a:t>
-                      </a:r>
-                      <a:endParaRPr kumimoji="1" lang="ja-JP" altLang="en-US" dirty="0"/>
-                    </a:p>
-                  </a:txBody>
-                  <a:tcPr/>
-                </a:tc>
-                <a:tc>
-                  <a:txBody>
-                    <a:bodyPr/>
-                    <a:lstStyle/>
-                    <a:p>
-                      <a:r>
-                        <a:rPr kumimoji="1" lang="ja-JP" altLang="en-US" dirty="0"/>
-                        <a:t>書き込みモード</a:t>
-                      </a:r>
-                    </a:p>
-                  </a:txBody>
-                  <a:tcPr/>
-                </a:tc>
-                <a:tc>
-                  <a:txBody>
-                    <a:bodyPr/>
-                    <a:lstStyle/>
-                    <a:p>
-                      <a:r>
-                        <a:rPr kumimoji="1" lang="ja-JP" altLang="en-US" dirty="0"/>
-                        <a:t>第２引数にあるファイルを書き込むために開く。</a:t>
-                      </a:r>
-                      <a:endParaRPr kumimoji="1" lang="en-US" altLang="ja-JP" dirty="0"/>
-                    </a:p>
-                    <a:p>
-                      <a:r>
-                        <a:rPr kumimoji="1" lang="ja-JP" altLang="en-US" dirty="0"/>
-                        <a:t>ファイルが存在しな場合は新規で作成する。</a:t>
-                      </a:r>
-                    </a:p>
-                  </a:txBody>
-                  <a:tcPr/>
-                </a:tc>
-                <a:extLst>
-                  <a:ext uri="{0D108BD9-81ED-4DB2-BD59-A6C34878D82A}">
-                    <a16:rowId xmlns:a16="http://schemas.microsoft.com/office/drawing/2014/main" val="425362728"/>
-                  </a:ext>
-                </a:extLst>
-              </a:tr>
-              <a:tr h="370840">
-                <a:tc>
-                  <a:txBody>
-                    <a:bodyPr/>
-                    <a:lstStyle/>
-                    <a:p>
-                      <a:r>
-                        <a:rPr kumimoji="1" lang="en-US" altLang="ja-JP" dirty="0"/>
-                        <a:t>“</a:t>
-                      </a:r>
-                      <a:r>
-                        <a:rPr kumimoji="1" lang="en-US" altLang="ja-JP" dirty="0" err="1"/>
-                        <a:t>wb</a:t>
-                      </a:r>
-                      <a:r>
-                        <a:rPr kumimoji="1" lang="en-US" altLang="ja-JP" dirty="0"/>
-                        <a:t>”</a:t>
-                      </a:r>
-                      <a:endParaRPr kumimoji="1" lang="ja-JP" altLang="en-US" dirty="0"/>
-                    </a:p>
-                  </a:txBody>
-                  <a:tcPr/>
-                </a:tc>
-                <a:tc>
-                  <a:txBody>
-                    <a:bodyPr/>
-                    <a:lstStyle/>
-                    <a:p>
-                      <a:r>
-                        <a:rPr kumimoji="1" lang="ja-JP" altLang="en-US" dirty="0"/>
-                        <a:t>バイナリ書き込みモード</a:t>
-                      </a:r>
-                    </a:p>
-                  </a:txBody>
-                  <a:tcPr/>
-                </a:tc>
-                <a:tc>
-                  <a:txBody>
-                    <a:bodyPr/>
-                    <a:lstStyle/>
-                    <a:p>
-                      <a:r>
-                        <a:rPr kumimoji="1" lang="ja-JP" altLang="en-US" dirty="0"/>
-                        <a:t>第２引数にあるファイルをバイナリで書き込むために開く。</a:t>
-                      </a:r>
-                      <a:endParaRPr kumimoji="1" lang="en-US" altLang="ja-JP" dirty="0"/>
-                    </a:p>
-                    <a:p>
-                      <a:r>
-                        <a:rPr kumimoji="1" lang="ja-JP" altLang="en-US" dirty="0"/>
-                        <a:t>ファイルが存在しな場合は新規で作成する。</a:t>
-                      </a:r>
-                    </a:p>
-                  </a:txBody>
-                  <a:tcPr/>
-                </a:tc>
-                <a:extLst>
-                  <a:ext uri="{0D108BD9-81ED-4DB2-BD59-A6C34878D82A}">
-                    <a16:rowId xmlns:a16="http://schemas.microsoft.com/office/drawing/2014/main" val="406984508"/>
-                  </a:ext>
-                </a:extLst>
-              </a:tr>
-            </a:tbl>
-          </a:graphicData>
-        </a:graphic>
-      </p:graphicFrame>
-      <p:sp>
-        <p:nvSpPr>
-          <p:cNvPr id="8" name="テキスト ボックス 7">
-            <a:extLst>
-              <a:ext uri="{FF2B5EF4-FFF2-40B4-BE49-F238E27FC236}">
-                <a16:creationId xmlns:a16="http://schemas.microsoft.com/office/drawing/2014/main" id="{A3D40EC7-B44C-4616-BE4F-2B60D829F67E}"/>
-              </a:ext>
-            </a:extLst>
-          </p:cNvPr>
-          <p:cNvSpPr txBox="1"/>
-          <p:nvPr/>
-        </p:nvSpPr>
-        <p:spPr>
-          <a:xfrm>
-            <a:off x="567541" y="6174171"/>
-            <a:ext cx="6032421" cy="461665"/>
-          </a:xfrm>
-          <a:prstGeom prst="rect">
-            <a:avLst/>
-          </a:prstGeom>
-          <a:noFill/>
-        </p:spPr>
-        <p:txBody>
-          <a:bodyPr wrap="none" rtlCol="0">
-            <a:spAutoFit/>
-          </a:bodyPr>
-          <a:lstStyle/>
-          <a:p>
-            <a:r>
-              <a:rPr lang="ja-JP" altLang="en-US" sz="2400" dirty="0"/>
-              <a:t>必要に応じて第３引数を指定しましょう。</a:t>
-            </a:r>
-            <a:endParaRPr lang="en-US" altLang="ja-JP" sz="2400" dirty="0"/>
-          </a:p>
-        </p:txBody>
-      </p:sp>
-    </p:spTree>
-    <p:extLst>
-      <p:ext uri="{BB962C8B-B14F-4D97-AF65-F5344CB8AC3E}">
-        <p14:creationId xmlns:p14="http://schemas.microsoft.com/office/powerpoint/2010/main" val="1491358413"/>
-      </p:ext>
-    </p:extLst>
-  </p:cSld>
-  <p:clrMapOvr>
-    <a:masterClrMapping/>
-  </p:clrMapOvr>
-</p:sld>
-</file>
-
-<file path=ppt/slides/slide8.xml><?xml version="1.0" encoding="utf-8"?>
-<p:sld xmlns:a="http://schemas.openxmlformats.org/drawingml/2006/main" xmlns:r="http://schemas.openxmlformats.org/officeDocument/2006/relationships" xmlns:p="http://schemas.openxmlformats.org/presentationml/2006/main">
-  <p:cSld>
-    <p:spTree>
-      <p:nvGrpSpPr>
-        <p:cNvPr id="1" name=""/>
-        <p:cNvGrpSpPr/>
-        <p:nvPr/>
-      </p:nvGrpSpPr>
-      <p:grpSpPr>
-        <a:xfrm>
-          <a:off x="0" y="0"/>
-          <a:ext cx="0" cy="0"/>
-          <a:chOff x="0" y="0"/>
-          <a:chExt cx="0" cy="0"/>
-        </a:xfrm>
-      </p:grpSpPr>
-      <p:sp>
-        <p:nvSpPr>
-          <p:cNvPr id="4" name="テキスト ボックス 3">
-            <a:extLst>
-              <a:ext uri="{FF2B5EF4-FFF2-40B4-BE49-F238E27FC236}">
-                <a16:creationId xmlns:a16="http://schemas.microsoft.com/office/drawing/2014/main" id="{5A13BF46-B8C5-48AA-8308-C9ECFF431A18}"/>
-              </a:ext>
-            </a:extLst>
-          </p:cNvPr>
-          <p:cNvSpPr txBox="1"/>
-          <p:nvPr/>
-        </p:nvSpPr>
-        <p:spPr>
-          <a:xfrm>
-            <a:off x="567542" y="491954"/>
-            <a:ext cx="2646878" cy="584775"/>
-          </a:xfrm>
-          <a:prstGeom prst="rect">
-            <a:avLst/>
-          </a:prstGeom>
-          <a:noFill/>
-        </p:spPr>
-        <p:txBody>
-          <a:bodyPr wrap="none" rtlCol="0">
-            <a:spAutoFit/>
-          </a:bodyPr>
-          <a:lstStyle/>
-          <a:p>
-            <a:r>
-              <a:rPr lang="ja-JP" altLang="en-US" sz="3200" b="1" u="sng" dirty="0"/>
-              <a:t>ファイル操作</a:t>
-            </a:r>
-            <a:endParaRPr kumimoji="1" lang="ja-JP" altLang="en-US" sz="3200" b="1" u="sng" dirty="0"/>
-          </a:p>
-        </p:txBody>
-      </p:sp>
-      <p:sp>
-        <p:nvSpPr>
-          <p:cNvPr id="9" name="テキスト ボックス 8">
-            <a:extLst>
-              <a:ext uri="{FF2B5EF4-FFF2-40B4-BE49-F238E27FC236}">
-                <a16:creationId xmlns:a16="http://schemas.microsoft.com/office/drawing/2014/main" id="{80F412F9-EC22-472D-8334-55F86CA5630B}"/>
-              </a:ext>
-            </a:extLst>
-          </p:cNvPr>
-          <p:cNvSpPr txBox="1"/>
-          <p:nvPr/>
-        </p:nvSpPr>
-        <p:spPr>
-          <a:xfrm>
-            <a:off x="567542" y="1189161"/>
-            <a:ext cx="8186857" cy="830997"/>
-          </a:xfrm>
-          <a:prstGeom prst="rect">
-            <a:avLst/>
-          </a:prstGeom>
-          <a:noFill/>
-        </p:spPr>
-        <p:txBody>
-          <a:bodyPr wrap="none" rtlCol="0">
-            <a:spAutoFit/>
-          </a:bodyPr>
-          <a:lstStyle/>
-          <a:p>
-            <a:r>
-              <a:rPr lang="en-US" altLang="ja-JP" sz="2400" b="1" dirty="0" err="1">
-                <a:solidFill>
-                  <a:srgbClr val="FF0000"/>
-                </a:solidFill>
-              </a:rPr>
-              <a:t>fwrite</a:t>
-            </a:r>
-            <a:r>
-              <a:rPr lang="ja-JP" altLang="en-US" sz="2400" b="1" dirty="0">
-                <a:solidFill>
-                  <a:srgbClr val="FF0000"/>
-                </a:solidFill>
-              </a:rPr>
-              <a:t>関数</a:t>
-            </a:r>
-            <a:r>
-              <a:rPr lang="ja-JP" altLang="en-US" sz="2400" dirty="0"/>
-              <a:t>で</a:t>
-            </a:r>
-            <a:r>
-              <a:rPr lang="ja-JP" altLang="en-US" sz="2400" b="1" dirty="0">
-                <a:solidFill>
-                  <a:srgbClr val="FF0000"/>
-                </a:solidFill>
-              </a:rPr>
-              <a:t>開いているファイルに書き込み</a:t>
-            </a:r>
-            <a:r>
-              <a:rPr lang="ja-JP" altLang="en-US" sz="2400" dirty="0"/>
-              <a:t>ます。</a:t>
-            </a:r>
-            <a:endParaRPr lang="en-US" altLang="ja-JP" sz="2400" dirty="0"/>
-          </a:p>
-          <a:p>
-            <a:r>
-              <a:rPr lang="ja-JP" altLang="en-US" sz="2400" dirty="0"/>
-              <a:t>書き込みモードで開いている時でないと処理できません。</a:t>
-            </a:r>
-            <a:endParaRPr lang="en-US" altLang="ja-JP" sz="2400" dirty="0"/>
-          </a:p>
-        </p:txBody>
-      </p:sp>
-      <p:pic>
-        <p:nvPicPr>
-          <p:cNvPr id="3" name="図 2">
-            <a:extLst>
-              <a:ext uri="{FF2B5EF4-FFF2-40B4-BE49-F238E27FC236}">
-                <a16:creationId xmlns:a16="http://schemas.microsoft.com/office/drawing/2014/main" id="{151E7EFA-ED04-4BF8-BC79-CB3C70A4A1F9}"/>
-              </a:ext>
-            </a:extLst>
-          </p:cNvPr>
-          <p:cNvPicPr>
-            <a:picLocks noChangeAspect="1"/>
-          </p:cNvPicPr>
-          <p:nvPr/>
-        </p:nvPicPr>
-        <p:blipFill>
-          <a:blip r:embed="rId2"/>
-          <a:stretch>
-            <a:fillRect/>
-          </a:stretch>
-        </p:blipFill>
-        <p:spPr>
-          <a:xfrm>
-            <a:off x="567542" y="2132590"/>
-            <a:ext cx="9423444" cy="978472"/>
-          </a:xfrm>
-          <a:prstGeom prst="rect">
-            <a:avLst/>
-          </a:prstGeom>
-        </p:spPr>
-      </p:pic>
-      <p:sp>
-        <p:nvSpPr>
-          <p:cNvPr id="8" name="テキスト ボックス 7">
-            <a:extLst>
-              <a:ext uri="{FF2B5EF4-FFF2-40B4-BE49-F238E27FC236}">
-                <a16:creationId xmlns:a16="http://schemas.microsoft.com/office/drawing/2014/main" id="{94312B42-5044-4F96-AE46-635C63E09F6D}"/>
-              </a:ext>
-            </a:extLst>
-          </p:cNvPr>
-          <p:cNvSpPr txBox="1"/>
-          <p:nvPr/>
-        </p:nvSpPr>
-        <p:spPr>
-          <a:xfrm>
-            <a:off x="567542" y="3223494"/>
-            <a:ext cx="7930376" cy="3046988"/>
-          </a:xfrm>
-          <a:prstGeom prst="rect">
-            <a:avLst/>
-          </a:prstGeom>
-          <a:noFill/>
-        </p:spPr>
-        <p:txBody>
-          <a:bodyPr wrap="none" rtlCol="0">
-            <a:spAutoFit/>
-          </a:bodyPr>
-          <a:lstStyle/>
-          <a:p>
-            <a:r>
-              <a:rPr lang="ja-JP" altLang="en-US" sz="2400" b="1" dirty="0">
-                <a:solidFill>
-                  <a:srgbClr val="FF0000"/>
-                </a:solidFill>
-              </a:rPr>
-              <a:t>■</a:t>
-            </a:r>
-            <a:r>
-              <a:rPr lang="en-US" altLang="ja-JP" sz="2400" b="1" dirty="0" err="1">
-                <a:solidFill>
-                  <a:srgbClr val="FF0000"/>
-                </a:solidFill>
-              </a:rPr>
-              <a:t>fwrite</a:t>
-            </a:r>
-            <a:r>
-              <a:rPr lang="ja-JP" altLang="en-US" sz="2400" b="1" dirty="0">
-                <a:solidFill>
-                  <a:srgbClr val="FF0000"/>
-                </a:solidFill>
-              </a:rPr>
-              <a:t>の引数</a:t>
+              <a:t>を書きます。</a:t>
             </a:r>
             <a:endParaRPr lang="en-US" altLang="ja-JP" sz="2400" b="1" dirty="0">
               <a:solidFill>
@@ -5589,227 +4285,12 @@
               </a:solidFill>
             </a:endParaRPr>
           </a:p>
-          <a:p>
-            <a:r>
-              <a:rPr lang="ja-JP" altLang="en-US" sz="2400" dirty="0"/>
-              <a:t>１．書き出すデータが入っている変数のアドレス</a:t>
-            </a:r>
-            <a:endParaRPr lang="en-US" altLang="ja-JP" sz="2400" dirty="0"/>
-          </a:p>
-          <a:p>
-            <a:r>
-              <a:rPr lang="ja-JP" altLang="en-US" sz="2400" dirty="0"/>
-              <a:t>２．書き出すデータのサイズ（単位：バイト）</a:t>
-            </a:r>
-            <a:endParaRPr lang="en-US" altLang="ja-JP" sz="2400" dirty="0"/>
-          </a:p>
-          <a:p>
-            <a:r>
-              <a:rPr lang="ja-JP" altLang="en-US" sz="2400" dirty="0"/>
-              <a:t>３．書き出す回数</a:t>
-            </a:r>
-            <a:endParaRPr lang="en-US" altLang="ja-JP" sz="2400" dirty="0"/>
-          </a:p>
-          <a:p>
-            <a:r>
-              <a:rPr lang="ja-JP" altLang="en-US" sz="2400" dirty="0"/>
-              <a:t>４．ファイルポインタ</a:t>
-            </a:r>
-            <a:endParaRPr lang="en-US" altLang="ja-JP" sz="2400" dirty="0"/>
-          </a:p>
-          <a:p>
-            <a:endParaRPr lang="en-US" altLang="ja-JP" sz="2400" dirty="0"/>
-          </a:p>
-          <a:p>
-            <a:r>
-              <a:rPr lang="en-US" altLang="ja-JP" sz="2400" b="1" dirty="0">
-                <a:solidFill>
-                  <a:srgbClr val="00B050"/>
-                </a:solidFill>
-              </a:rPr>
-              <a:t>MEMO</a:t>
-            </a:r>
-          </a:p>
-          <a:p>
-            <a:r>
-              <a:rPr lang="en-US" altLang="ja-JP" sz="2400" b="1" dirty="0" err="1">
-                <a:solidFill>
-                  <a:srgbClr val="0070C0"/>
-                </a:solidFill>
-              </a:rPr>
-              <a:t>siziof</a:t>
-            </a:r>
-            <a:r>
-              <a:rPr lang="ja-JP" altLang="en-US" sz="2400" dirty="0"/>
-              <a:t>は</a:t>
-            </a:r>
-            <a:r>
-              <a:rPr lang="en-US" altLang="ja-JP" sz="2400" b="1" dirty="0">
-                <a:solidFill>
-                  <a:srgbClr val="FF0000"/>
-                </a:solidFill>
-              </a:rPr>
-              <a:t>()</a:t>
-            </a:r>
-            <a:r>
-              <a:rPr lang="ja-JP" altLang="en-US" sz="2400" b="1" dirty="0">
-                <a:solidFill>
-                  <a:srgbClr val="FF0000"/>
-                </a:solidFill>
-              </a:rPr>
-              <a:t>カッコ内の変数のサイズを得る</a:t>
-            </a:r>
-            <a:r>
-              <a:rPr lang="ja-JP" altLang="en-US" sz="2400" dirty="0"/>
-              <a:t>ことができる。</a:t>
-            </a:r>
-            <a:endParaRPr lang="en-US" altLang="ja-JP" sz="2400" dirty="0"/>
-          </a:p>
         </p:txBody>
       </p:sp>
     </p:spTree>
     <p:extLst>
       <p:ext uri="{BB962C8B-B14F-4D97-AF65-F5344CB8AC3E}">
-        <p14:creationId xmlns:p14="http://schemas.microsoft.com/office/powerpoint/2010/main" val="1033629807"/>
-      </p:ext>
-    </p:extLst>
-  </p:cSld>
-  <p:clrMapOvr>
-    <a:masterClrMapping/>
-  </p:clrMapOvr>
-</p:sld>
-</file>
-
-<file path=ppt/slides/slide9.xml><?xml version="1.0" encoding="utf-8"?>
-<p:sld xmlns:a="http://schemas.openxmlformats.org/drawingml/2006/main" xmlns:r="http://schemas.openxmlformats.org/officeDocument/2006/relationships" xmlns:p="http://schemas.openxmlformats.org/presentationml/2006/main">
-  <p:cSld>
-    <p:spTree>
-      <p:nvGrpSpPr>
-        <p:cNvPr id="1" name=""/>
-        <p:cNvGrpSpPr/>
-        <p:nvPr/>
-      </p:nvGrpSpPr>
-      <p:grpSpPr>
-        <a:xfrm>
-          <a:off x="0" y="0"/>
-          <a:ext cx="0" cy="0"/>
-          <a:chOff x="0" y="0"/>
-          <a:chExt cx="0" cy="0"/>
-        </a:xfrm>
-      </p:grpSpPr>
-      <p:sp>
-        <p:nvSpPr>
-          <p:cNvPr id="4" name="テキスト ボックス 3">
-            <a:extLst>
-              <a:ext uri="{FF2B5EF4-FFF2-40B4-BE49-F238E27FC236}">
-                <a16:creationId xmlns:a16="http://schemas.microsoft.com/office/drawing/2014/main" id="{5A13BF46-B8C5-48AA-8308-C9ECFF431A18}"/>
-              </a:ext>
-            </a:extLst>
-          </p:cNvPr>
-          <p:cNvSpPr txBox="1"/>
-          <p:nvPr/>
-        </p:nvSpPr>
-        <p:spPr>
-          <a:xfrm>
-            <a:off x="567542" y="491954"/>
-            <a:ext cx="2646878" cy="584775"/>
-          </a:xfrm>
-          <a:prstGeom prst="rect">
-            <a:avLst/>
-          </a:prstGeom>
-          <a:noFill/>
-        </p:spPr>
-        <p:txBody>
-          <a:bodyPr wrap="none" rtlCol="0">
-            <a:spAutoFit/>
-          </a:bodyPr>
-          <a:lstStyle/>
-          <a:p>
-            <a:r>
-              <a:rPr lang="ja-JP" altLang="en-US" sz="3200" b="1" u="sng" dirty="0"/>
-              <a:t>ファイル操作</a:t>
-            </a:r>
-            <a:endParaRPr kumimoji="1" lang="ja-JP" altLang="en-US" sz="3200" b="1" u="sng" dirty="0"/>
-          </a:p>
-        </p:txBody>
-      </p:sp>
-      <p:sp>
-        <p:nvSpPr>
-          <p:cNvPr id="9" name="テキスト ボックス 8">
-            <a:extLst>
-              <a:ext uri="{FF2B5EF4-FFF2-40B4-BE49-F238E27FC236}">
-                <a16:creationId xmlns:a16="http://schemas.microsoft.com/office/drawing/2014/main" id="{80F412F9-EC22-472D-8334-55F86CA5630B}"/>
-              </a:ext>
-            </a:extLst>
-          </p:cNvPr>
-          <p:cNvSpPr txBox="1"/>
-          <p:nvPr/>
-        </p:nvSpPr>
-        <p:spPr>
-          <a:xfrm>
-            <a:off x="567542" y="1189161"/>
-            <a:ext cx="8494633" cy="830997"/>
-          </a:xfrm>
-          <a:prstGeom prst="rect">
-            <a:avLst/>
-          </a:prstGeom>
-          <a:noFill/>
-        </p:spPr>
-        <p:txBody>
-          <a:bodyPr wrap="none" rtlCol="0">
-            <a:spAutoFit/>
-          </a:bodyPr>
-          <a:lstStyle/>
-          <a:p>
-            <a:r>
-              <a:rPr lang="ja-JP" altLang="en-US" sz="2400" dirty="0"/>
-              <a:t>書き出しのプログラムをコメントにして、</a:t>
-            </a:r>
-            <a:endParaRPr lang="en-US" altLang="ja-JP" sz="2400" dirty="0"/>
-          </a:p>
-          <a:p>
-            <a:r>
-              <a:rPr lang="ja-JP" altLang="en-US" sz="2400" dirty="0"/>
-              <a:t>同じプロジェクトに読み込みのプログラムを書きましょう。</a:t>
-            </a:r>
-            <a:endParaRPr lang="en-US" altLang="ja-JP" sz="2400" dirty="0"/>
-          </a:p>
-        </p:txBody>
-      </p:sp>
-      <p:pic>
-        <p:nvPicPr>
-          <p:cNvPr id="7" name="図 6">
-            <a:extLst>
-              <a:ext uri="{FF2B5EF4-FFF2-40B4-BE49-F238E27FC236}">
-                <a16:creationId xmlns:a16="http://schemas.microsoft.com/office/drawing/2014/main" id="{39C4B06F-6FA6-4CE2-95C6-E89991EBC67F}"/>
-              </a:ext>
-            </a:extLst>
-          </p:cNvPr>
-          <p:cNvPicPr>
-            <a:picLocks noChangeAspect="1"/>
-          </p:cNvPicPr>
-          <p:nvPr/>
-        </p:nvPicPr>
-        <p:blipFill>
-          <a:blip r:embed="rId2"/>
-          <a:stretch>
-            <a:fillRect/>
-          </a:stretch>
-        </p:blipFill>
-        <p:spPr>
-          <a:xfrm>
-            <a:off x="567542" y="2132591"/>
-            <a:ext cx="5875299" cy="4568892"/>
-          </a:xfrm>
-          <a:prstGeom prst="rect">
-            <a:avLst/>
-          </a:prstGeom>
-        </p:spPr>
-      </p:pic>
-    </p:spTree>
-    <p:extLst>
-      <p:ext uri="{BB962C8B-B14F-4D97-AF65-F5344CB8AC3E}">
-        <p14:creationId xmlns:p14="http://schemas.microsoft.com/office/powerpoint/2010/main" val="2622205382"/>
+        <p14:creationId xmlns:p14="http://schemas.microsoft.com/office/powerpoint/2010/main" val="1770504083"/>
       </p:ext>
     </p:extLst>
   </p:cSld>

--- a/ゲーム科1年/00_前期/プログラミングⅡ/18_const修飾子.pptx
+++ b/ゲーム科1年/00_前期/プログラミングⅡ/18_const修飾子.pptx
@@ -9,6 +9,12 @@
     <p:sldId id="257" r:id="rId3"/>
     <p:sldId id="259" r:id="rId4"/>
     <p:sldId id="260" r:id="rId5"/>
+    <p:sldId id="261" r:id="rId6"/>
+    <p:sldId id="262" r:id="rId7"/>
+    <p:sldId id="263" r:id="rId8"/>
+    <p:sldId id="264" r:id="rId9"/>
+    <p:sldId id="265" r:id="rId10"/>
+    <p:sldId id="266" r:id="rId11"/>
   </p:sldIdLst>
   <p:sldSz cx="12192000" cy="6858000"/>
   <p:notesSz cx="6858000" cy="9144000"/>
@@ -262,7 +268,7 @@
           <a:p>
             <a:fld id="{E9CC885B-4903-4D54-9A93-00025F12DED9}" type="datetimeFigureOut">
               <a:rPr kumimoji="1" lang="ja-JP" altLang="en-US" smtClean="0"/>
-              <a:t>2026/3/3</a:t>
+              <a:t>2026/3/10</a:t>
             </a:fld>
             <a:endParaRPr kumimoji="1" lang="ja-JP" altLang="en-US"/>
           </a:p>
@@ -492,7 +498,7 @@
           <a:p>
             <a:fld id="{E9CC885B-4903-4D54-9A93-00025F12DED9}" type="datetimeFigureOut">
               <a:rPr kumimoji="1" lang="ja-JP" altLang="en-US" smtClean="0"/>
-              <a:t>2026/3/3</a:t>
+              <a:t>2026/3/10</a:t>
             </a:fld>
             <a:endParaRPr kumimoji="1" lang="ja-JP" altLang="en-US"/>
           </a:p>
@@ -732,7 +738,7 @@
           <a:p>
             <a:fld id="{E9CC885B-4903-4D54-9A93-00025F12DED9}" type="datetimeFigureOut">
               <a:rPr kumimoji="1" lang="ja-JP" altLang="en-US" smtClean="0"/>
-              <a:t>2026/3/3</a:t>
+              <a:t>2026/3/10</a:t>
             </a:fld>
             <a:endParaRPr kumimoji="1" lang="ja-JP" altLang="en-US"/>
           </a:p>
@@ -962,7 +968,7 @@
           <a:p>
             <a:fld id="{E9CC885B-4903-4D54-9A93-00025F12DED9}" type="datetimeFigureOut">
               <a:rPr kumimoji="1" lang="ja-JP" altLang="en-US" smtClean="0"/>
-              <a:t>2026/3/3</a:t>
+              <a:t>2026/3/10</a:t>
             </a:fld>
             <a:endParaRPr kumimoji="1" lang="ja-JP" altLang="en-US"/>
           </a:p>
@@ -1237,7 +1243,7 @@
           <a:p>
             <a:fld id="{E9CC885B-4903-4D54-9A93-00025F12DED9}" type="datetimeFigureOut">
               <a:rPr kumimoji="1" lang="ja-JP" altLang="en-US" smtClean="0"/>
-              <a:t>2026/3/3</a:t>
+              <a:t>2026/3/10</a:t>
             </a:fld>
             <a:endParaRPr kumimoji="1" lang="ja-JP" altLang="en-US"/>
           </a:p>
@@ -1566,7 +1572,7 @@
           <a:p>
             <a:fld id="{E9CC885B-4903-4D54-9A93-00025F12DED9}" type="datetimeFigureOut">
               <a:rPr kumimoji="1" lang="ja-JP" altLang="en-US" smtClean="0"/>
-              <a:t>2026/3/3</a:t>
+              <a:t>2026/3/10</a:t>
             </a:fld>
             <a:endParaRPr kumimoji="1" lang="ja-JP" altLang="en-US"/>
           </a:p>
@@ -2042,7 +2048,7 @@
           <a:p>
             <a:fld id="{E9CC885B-4903-4D54-9A93-00025F12DED9}" type="datetimeFigureOut">
               <a:rPr kumimoji="1" lang="ja-JP" altLang="en-US" smtClean="0"/>
-              <a:t>2026/3/3</a:t>
+              <a:t>2026/3/10</a:t>
             </a:fld>
             <a:endParaRPr kumimoji="1" lang="ja-JP" altLang="en-US"/>
           </a:p>
@@ -2183,7 +2189,7 @@
           <a:p>
             <a:fld id="{E9CC885B-4903-4D54-9A93-00025F12DED9}" type="datetimeFigureOut">
               <a:rPr kumimoji="1" lang="ja-JP" altLang="en-US" smtClean="0"/>
-              <a:t>2026/3/3</a:t>
+              <a:t>2026/3/10</a:t>
             </a:fld>
             <a:endParaRPr kumimoji="1" lang="ja-JP" altLang="en-US"/>
           </a:p>
@@ -2296,7 +2302,7 @@
           <a:p>
             <a:fld id="{E9CC885B-4903-4D54-9A93-00025F12DED9}" type="datetimeFigureOut">
               <a:rPr kumimoji="1" lang="ja-JP" altLang="en-US" smtClean="0"/>
-              <a:t>2026/3/3</a:t>
+              <a:t>2026/3/10</a:t>
             </a:fld>
             <a:endParaRPr kumimoji="1" lang="ja-JP" altLang="en-US"/>
           </a:p>
@@ -2639,7 +2645,7 @@
           <a:p>
             <a:fld id="{E9CC885B-4903-4D54-9A93-00025F12DED9}" type="datetimeFigureOut">
               <a:rPr kumimoji="1" lang="ja-JP" altLang="en-US" smtClean="0"/>
-              <a:t>2026/3/3</a:t>
+              <a:t>2026/3/10</a:t>
             </a:fld>
             <a:endParaRPr kumimoji="1" lang="ja-JP" altLang="en-US"/>
           </a:p>
@@ -2927,7 +2933,7 @@
           <a:p>
             <a:fld id="{E9CC885B-4903-4D54-9A93-00025F12DED9}" type="datetimeFigureOut">
               <a:rPr kumimoji="1" lang="ja-JP" altLang="en-US" smtClean="0"/>
-              <a:t>2026/3/3</a:t>
+              <a:t>2026/3/10</a:t>
             </a:fld>
             <a:endParaRPr kumimoji="1" lang="ja-JP" altLang="en-US"/>
           </a:p>
@@ -3200,7 +3206,7 @@
           <a:p>
             <a:fld id="{E9CC885B-4903-4D54-9A93-00025F12DED9}" type="datetimeFigureOut">
               <a:rPr kumimoji="1" lang="ja-JP" altLang="en-US" smtClean="0"/>
-              <a:t>2026/3/3</a:t>
+              <a:t>2026/3/10</a:t>
             </a:fld>
             <a:endParaRPr kumimoji="1" lang="ja-JP" altLang="en-US"/>
           </a:p>
@@ -3672,7 +3678,7 @@
         <p:spPr>
           <a:xfrm>
             <a:off x="567542" y="1189161"/>
-            <a:ext cx="6340197" cy="4154984"/>
+            <a:ext cx="5724644" cy="4154984"/>
           </a:xfrm>
           <a:prstGeom prst="rect">
             <a:avLst/>
@@ -3687,7 +3693,7 @@
           <a:p>
             <a:r>
               <a:rPr lang="ja-JP" altLang="en-US" sz="2400" dirty="0"/>
-              <a:t>プログラムには２つの種類の数があります。</a:t>
+              <a:t>プログラムには２種類の数があります。</a:t>
             </a:r>
             <a:endParaRPr lang="en-US" altLang="ja-JP" sz="2400" dirty="0"/>
           </a:p>
@@ -3783,6 +3789,204 @@
     <p:extLst>
       <p:ext uri="{BB962C8B-B14F-4D97-AF65-F5344CB8AC3E}">
         <p14:creationId xmlns:p14="http://schemas.microsoft.com/office/powerpoint/2010/main" val="2931075229"/>
+      </p:ext>
+    </p:extLst>
+  </p:cSld>
+  <p:clrMapOvr>
+    <a:masterClrMapping/>
+  </p:clrMapOvr>
+</p:sld>
+</file>
+
+<file path=ppt/slides/slide10.xml><?xml version="1.0" encoding="utf-8"?>
+<p:sld xmlns:a="http://schemas.openxmlformats.org/drawingml/2006/main" xmlns:r="http://schemas.openxmlformats.org/officeDocument/2006/relationships" xmlns:p="http://schemas.openxmlformats.org/presentationml/2006/main">
+  <p:cSld>
+    <p:spTree>
+      <p:nvGrpSpPr>
+        <p:cNvPr id="1" name=""/>
+        <p:cNvGrpSpPr/>
+        <p:nvPr/>
+      </p:nvGrpSpPr>
+      <p:grpSpPr>
+        <a:xfrm>
+          <a:off x="0" y="0"/>
+          <a:ext cx="0" cy="0"/>
+          <a:chOff x="0" y="0"/>
+          <a:chExt cx="0" cy="0"/>
+        </a:xfrm>
+      </p:grpSpPr>
+      <p:sp>
+        <p:nvSpPr>
+          <p:cNvPr id="4" name="テキスト ボックス 3">
+            <a:extLst>
+              <a:ext uri="{FF2B5EF4-FFF2-40B4-BE49-F238E27FC236}">
+                <a16:creationId xmlns:a16="http://schemas.microsoft.com/office/drawing/2014/main" id="{5A13BF46-B8C5-48AA-8308-C9ECFF431A18}"/>
+              </a:ext>
+            </a:extLst>
+          </p:cNvPr>
+          <p:cNvSpPr txBox="1"/>
+          <p:nvPr/>
+        </p:nvSpPr>
+        <p:spPr>
+          <a:xfrm>
+            <a:off x="567542" y="491954"/>
+            <a:ext cx="2513830" cy="584775"/>
+          </a:xfrm>
+          <a:prstGeom prst="rect">
+            <a:avLst/>
+          </a:prstGeom>
+          <a:noFill/>
+        </p:spPr>
+        <p:txBody>
+          <a:bodyPr wrap="none" rtlCol="0">
+            <a:spAutoFit/>
+          </a:bodyPr>
+          <a:lstStyle/>
+          <a:p>
+            <a:r>
+              <a:rPr lang="en-US" altLang="ja-JP" sz="3200" b="1" u="sng" dirty="0"/>
+              <a:t>const</a:t>
+            </a:r>
+            <a:r>
+              <a:rPr lang="ja-JP" altLang="en-US" sz="3200" b="1" u="sng" dirty="0"/>
+              <a:t>修飾子</a:t>
+            </a:r>
+            <a:endParaRPr kumimoji="1" lang="ja-JP" altLang="en-US" sz="3200" b="1" u="sng" dirty="0"/>
+          </a:p>
+        </p:txBody>
+      </p:sp>
+      <p:sp>
+        <p:nvSpPr>
+          <p:cNvPr id="9" name="テキスト ボックス 8">
+            <a:extLst>
+              <a:ext uri="{FF2B5EF4-FFF2-40B4-BE49-F238E27FC236}">
+                <a16:creationId xmlns:a16="http://schemas.microsoft.com/office/drawing/2014/main" id="{80F412F9-EC22-472D-8334-55F86CA5630B}"/>
+              </a:ext>
+            </a:extLst>
+          </p:cNvPr>
+          <p:cNvSpPr txBox="1"/>
+          <p:nvPr/>
+        </p:nvSpPr>
+        <p:spPr>
+          <a:xfrm>
+            <a:off x="567542" y="1189161"/>
+            <a:ext cx="9010800" cy="3416320"/>
+          </a:xfrm>
+          <a:prstGeom prst="rect">
+            <a:avLst/>
+          </a:prstGeom>
+          <a:noFill/>
+        </p:spPr>
+        <p:txBody>
+          <a:bodyPr wrap="none" rtlCol="0">
+            <a:spAutoFit/>
+          </a:bodyPr>
+          <a:lstStyle/>
+          <a:p>
+            <a:r>
+              <a:rPr lang="en-US" altLang="ja-JP" sz="2400" b="1" dirty="0">
+                <a:solidFill>
+                  <a:srgbClr val="0070C0"/>
+                </a:solidFill>
+              </a:rPr>
+              <a:t>const</a:t>
+            </a:r>
+            <a:r>
+              <a:rPr lang="ja-JP" altLang="en-US" sz="2400" dirty="0"/>
+              <a:t>はチーム制作をする中で、</a:t>
+            </a:r>
+            <a:endParaRPr lang="en-US" altLang="ja-JP" sz="2400" dirty="0"/>
+          </a:p>
+          <a:p>
+            <a:r>
+              <a:rPr lang="ja-JP" altLang="en-US" sz="2400" b="1" dirty="0">
+                <a:solidFill>
+                  <a:srgbClr val="FF0000"/>
+                </a:solidFill>
+              </a:rPr>
+              <a:t>他のメンバーに処理の仕様を伝えやすくする役割</a:t>
+            </a:r>
+            <a:r>
+              <a:rPr lang="ja-JP" altLang="en-US" sz="2400" dirty="0"/>
+              <a:t>もあります。</a:t>
+            </a:r>
+            <a:endParaRPr lang="en-US" altLang="ja-JP" sz="2400" dirty="0"/>
+          </a:p>
+          <a:p>
+            <a:r>
+              <a:rPr lang="ja-JP" altLang="en-US" sz="2400" dirty="0"/>
+              <a:t>地味ですが非常に重要な役割です。</a:t>
+            </a:r>
+            <a:endParaRPr lang="en-US" altLang="ja-JP" sz="2400" dirty="0"/>
+          </a:p>
+          <a:p>
+            <a:endParaRPr lang="en-US" altLang="ja-JP" sz="2400" dirty="0"/>
+          </a:p>
+          <a:p>
+            <a:r>
+              <a:rPr lang="ja-JP" altLang="en-US" sz="2400" dirty="0"/>
+              <a:t>まずは、</a:t>
+            </a:r>
+            <a:endParaRPr lang="en-US" altLang="ja-JP" sz="2400" dirty="0"/>
+          </a:p>
+          <a:p>
+            <a:r>
+              <a:rPr lang="ja-JP" altLang="en-US" sz="2400" b="1" dirty="0">
+                <a:solidFill>
+                  <a:srgbClr val="FF0000"/>
+                </a:solidFill>
+              </a:rPr>
+              <a:t>書き変わってはいけないものに</a:t>
+            </a:r>
+            <a:r>
+              <a:rPr lang="en-US" altLang="ja-JP" sz="2400" b="1" dirty="0">
+                <a:solidFill>
+                  <a:srgbClr val="FF0000"/>
+                </a:solidFill>
+              </a:rPr>
+              <a:t>const</a:t>
+            </a:r>
+            <a:r>
+              <a:rPr lang="ja-JP" altLang="en-US" sz="2400" b="1" dirty="0">
+                <a:solidFill>
+                  <a:srgbClr val="FF0000"/>
+                </a:solidFill>
+              </a:rPr>
+              <a:t>を付ける</a:t>
+            </a:r>
+            <a:r>
+              <a:rPr lang="ja-JP" altLang="en-US" sz="2400" dirty="0"/>
+              <a:t>ことを意識して、</a:t>
+            </a:r>
+            <a:endParaRPr lang="en-US" altLang="ja-JP" sz="2400" dirty="0"/>
+          </a:p>
+          <a:p>
+            <a:r>
+              <a:rPr lang="ja-JP" altLang="en-US" sz="2400" dirty="0"/>
+              <a:t>プログラミングするようにしましょう。</a:t>
+            </a:r>
+            <a:endParaRPr lang="en-US" altLang="ja-JP" sz="2400" dirty="0"/>
+          </a:p>
+          <a:p>
+            <a:endParaRPr lang="en-US" altLang="ja-JP" sz="2400" dirty="0"/>
+          </a:p>
+          <a:p>
+            <a:r>
+              <a:rPr lang="en-US" altLang="ja-JP" sz="2400" dirty="0"/>
+              <a:t>※</a:t>
+            </a:r>
+            <a:r>
+              <a:rPr lang="ja-JP" altLang="en-US" sz="2400" dirty="0"/>
+              <a:t>きちんと使用するプログラマーはみんなに好かれます</a:t>
+            </a:r>
+            <a:endParaRPr lang="en-US" altLang="ja-JP" sz="2400" dirty="0"/>
+          </a:p>
+        </p:txBody>
+      </p:sp>
+    </p:spTree>
+    <p:extLst>
+      <p:ext uri="{BB962C8B-B14F-4D97-AF65-F5344CB8AC3E}">
+        <p14:creationId xmlns:p14="http://schemas.microsoft.com/office/powerpoint/2010/main" val="3514696214"/>
       </p:ext>
     </p:extLst>
   </p:cSld>
@@ -4154,12 +4358,16 @@
               <a:t>（</a:t>
             </a:r>
             <a:r>
-              <a:rPr lang="en-US" altLang="ja-JP" sz="2400" dirty="0"/>
+              <a:rPr lang="en-US" altLang="ja-JP" sz="2400" b="1" dirty="0">
+                <a:solidFill>
+                  <a:srgbClr val="7030A0"/>
+                </a:solidFill>
+              </a:rPr>
               <a:t>#define</a:t>
             </a:r>
             <a:r>
               <a:rPr lang="ja-JP" altLang="en-US" sz="2400" dirty="0"/>
-              <a:t>でもいいです）</a:t>
+              <a:t>も定数の一種）</a:t>
             </a:r>
             <a:endParaRPr lang="en-US" altLang="ja-JP" sz="2400" dirty="0"/>
           </a:p>
@@ -4287,10 +4495,897 @@
           </a:p>
         </p:txBody>
       </p:sp>
+      <p:pic>
+        <p:nvPicPr>
+          <p:cNvPr id="6" name="図 5">
+            <a:extLst>
+              <a:ext uri="{FF2B5EF4-FFF2-40B4-BE49-F238E27FC236}">
+                <a16:creationId xmlns:a16="http://schemas.microsoft.com/office/drawing/2014/main" id="{FF9659CF-F8E3-45F0-B80A-502E2D136C13}"/>
+              </a:ext>
+            </a:extLst>
+          </p:cNvPr>
+          <p:cNvPicPr>
+            <a:picLocks noChangeAspect="1"/>
+          </p:cNvPicPr>
+          <p:nvPr/>
+        </p:nvPicPr>
+        <p:blipFill>
+          <a:blip r:embed="rId2"/>
+          <a:stretch>
+            <a:fillRect/>
+          </a:stretch>
+        </p:blipFill>
+        <p:spPr>
+          <a:xfrm>
+            <a:off x="567542" y="1763258"/>
+            <a:ext cx="5685473" cy="4781475"/>
+          </a:xfrm>
+          <a:prstGeom prst="rect">
+            <a:avLst/>
+          </a:prstGeom>
+        </p:spPr>
+      </p:pic>
     </p:spTree>
     <p:extLst>
       <p:ext uri="{BB962C8B-B14F-4D97-AF65-F5344CB8AC3E}">
         <p14:creationId xmlns:p14="http://schemas.microsoft.com/office/powerpoint/2010/main" val="1770504083"/>
+      </p:ext>
+    </p:extLst>
+  </p:cSld>
+  <p:clrMapOvr>
+    <a:masterClrMapping/>
+  </p:clrMapOvr>
+</p:sld>
+</file>
+
+<file path=ppt/slides/slide5.xml><?xml version="1.0" encoding="utf-8"?>
+<p:sld xmlns:a="http://schemas.openxmlformats.org/drawingml/2006/main" xmlns:r="http://schemas.openxmlformats.org/officeDocument/2006/relationships" xmlns:p="http://schemas.openxmlformats.org/presentationml/2006/main">
+  <p:cSld>
+    <p:spTree>
+      <p:nvGrpSpPr>
+        <p:cNvPr id="1" name=""/>
+        <p:cNvGrpSpPr/>
+        <p:nvPr/>
+      </p:nvGrpSpPr>
+      <p:grpSpPr>
+        <a:xfrm>
+          <a:off x="0" y="0"/>
+          <a:ext cx="0" cy="0"/>
+          <a:chOff x="0" y="0"/>
+          <a:chExt cx="0" cy="0"/>
+        </a:xfrm>
+      </p:grpSpPr>
+      <p:sp>
+        <p:nvSpPr>
+          <p:cNvPr id="4" name="テキスト ボックス 3">
+            <a:extLst>
+              <a:ext uri="{FF2B5EF4-FFF2-40B4-BE49-F238E27FC236}">
+                <a16:creationId xmlns:a16="http://schemas.microsoft.com/office/drawing/2014/main" id="{5A13BF46-B8C5-48AA-8308-C9ECFF431A18}"/>
+              </a:ext>
+            </a:extLst>
+          </p:cNvPr>
+          <p:cNvSpPr txBox="1"/>
+          <p:nvPr/>
+        </p:nvSpPr>
+        <p:spPr>
+          <a:xfrm>
+            <a:off x="567542" y="491954"/>
+            <a:ext cx="2513830" cy="584775"/>
+          </a:xfrm>
+          <a:prstGeom prst="rect">
+            <a:avLst/>
+          </a:prstGeom>
+          <a:noFill/>
+        </p:spPr>
+        <p:txBody>
+          <a:bodyPr wrap="none" rtlCol="0">
+            <a:spAutoFit/>
+          </a:bodyPr>
+          <a:lstStyle/>
+          <a:p>
+            <a:r>
+              <a:rPr lang="en-US" altLang="ja-JP" sz="3200" b="1" u="sng" dirty="0"/>
+              <a:t>const</a:t>
+            </a:r>
+            <a:r>
+              <a:rPr lang="ja-JP" altLang="en-US" sz="3200" b="1" u="sng" dirty="0"/>
+              <a:t>修飾子</a:t>
+            </a:r>
+            <a:endParaRPr kumimoji="1" lang="ja-JP" altLang="en-US" sz="3200" b="1" u="sng" dirty="0"/>
+          </a:p>
+        </p:txBody>
+      </p:sp>
+      <p:sp>
+        <p:nvSpPr>
+          <p:cNvPr id="9" name="テキスト ボックス 8">
+            <a:extLst>
+              <a:ext uri="{FF2B5EF4-FFF2-40B4-BE49-F238E27FC236}">
+                <a16:creationId xmlns:a16="http://schemas.microsoft.com/office/drawing/2014/main" id="{80F412F9-EC22-472D-8334-55F86CA5630B}"/>
+              </a:ext>
+            </a:extLst>
+          </p:cNvPr>
+          <p:cNvSpPr txBox="1"/>
+          <p:nvPr/>
+        </p:nvSpPr>
+        <p:spPr>
+          <a:xfrm>
+            <a:off x="567542" y="1189161"/>
+            <a:ext cx="8703024" cy="461665"/>
+          </a:xfrm>
+          <a:prstGeom prst="rect">
+            <a:avLst/>
+          </a:prstGeom>
+          <a:noFill/>
+        </p:spPr>
+        <p:txBody>
+          <a:bodyPr wrap="none" rtlCol="0">
+            <a:spAutoFit/>
+          </a:bodyPr>
+          <a:lstStyle/>
+          <a:p>
+            <a:r>
+              <a:rPr lang="ja-JP" altLang="en-US" sz="2400" dirty="0"/>
+              <a:t>ポインタ変数が</a:t>
+            </a:r>
+            <a:r>
+              <a:rPr lang="en-US" altLang="ja-JP" sz="2400" b="1" dirty="0">
+                <a:solidFill>
+                  <a:srgbClr val="0070C0"/>
+                </a:solidFill>
+              </a:rPr>
+              <a:t>const</a:t>
+            </a:r>
+            <a:r>
+              <a:rPr lang="ja-JP" altLang="en-US" sz="2400" dirty="0"/>
+              <a:t>だと、参照先が変更できなくなります。</a:t>
+            </a:r>
+            <a:endParaRPr lang="en-US" altLang="ja-JP" sz="2400" b="1" dirty="0">
+              <a:solidFill>
+                <a:srgbClr val="FF0000"/>
+              </a:solidFill>
+            </a:endParaRPr>
+          </a:p>
+        </p:txBody>
+      </p:sp>
+      <p:pic>
+        <p:nvPicPr>
+          <p:cNvPr id="5" name="図 4">
+            <a:extLst>
+              <a:ext uri="{FF2B5EF4-FFF2-40B4-BE49-F238E27FC236}">
+                <a16:creationId xmlns:a16="http://schemas.microsoft.com/office/drawing/2014/main" id="{627ED2A9-83B2-4F87-B99E-49F52AA63202}"/>
+              </a:ext>
+            </a:extLst>
+          </p:cNvPr>
+          <p:cNvPicPr>
+            <a:picLocks noChangeAspect="1"/>
+          </p:cNvPicPr>
+          <p:nvPr/>
+        </p:nvPicPr>
+        <p:blipFill>
+          <a:blip r:embed="rId2"/>
+          <a:stretch>
+            <a:fillRect/>
+          </a:stretch>
+        </p:blipFill>
+        <p:spPr>
+          <a:xfrm>
+            <a:off x="567541" y="1763258"/>
+            <a:ext cx="7124543" cy="1555675"/>
+          </a:xfrm>
+          <a:prstGeom prst="rect">
+            <a:avLst/>
+          </a:prstGeom>
+        </p:spPr>
+      </p:pic>
+      <p:sp>
+        <p:nvSpPr>
+          <p:cNvPr id="7" name="テキスト ボックス 6">
+            <a:extLst>
+              <a:ext uri="{FF2B5EF4-FFF2-40B4-BE49-F238E27FC236}">
+                <a16:creationId xmlns:a16="http://schemas.microsoft.com/office/drawing/2014/main" id="{6577225F-CC1B-40AB-8BF0-8E4C6FC92AB0}"/>
+              </a:ext>
+            </a:extLst>
+          </p:cNvPr>
+          <p:cNvSpPr txBox="1"/>
+          <p:nvPr/>
+        </p:nvSpPr>
+        <p:spPr>
+          <a:xfrm>
+            <a:off x="567542" y="3543623"/>
+            <a:ext cx="7879080" cy="461665"/>
+          </a:xfrm>
+          <a:prstGeom prst="rect">
+            <a:avLst/>
+          </a:prstGeom>
+          <a:noFill/>
+        </p:spPr>
+        <p:txBody>
+          <a:bodyPr wrap="none" rtlCol="0">
+            <a:spAutoFit/>
+          </a:bodyPr>
+          <a:lstStyle/>
+          <a:p>
+            <a:r>
+              <a:rPr lang="ja-JP" altLang="en-US" sz="2400" dirty="0"/>
+              <a:t>主に</a:t>
+            </a:r>
+            <a:r>
+              <a:rPr lang="ja-JP" altLang="en-US" sz="2400" b="1" dirty="0">
+                <a:solidFill>
+                  <a:srgbClr val="FF0000"/>
+                </a:solidFill>
+              </a:rPr>
+              <a:t>参照先を見るだけに使用したい場合</a:t>
+            </a:r>
+            <a:r>
+              <a:rPr lang="ja-JP" altLang="en-US" sz="2400" dirty="0"/>
+              <a:t>に使用します。</a:t>
+            </a:r>
+            <a:endParaRPr lang="en-US" altLang="ja-JP" sz="2400" dirty="0"/>
+          </a:p>
+        </p:txBody>
+      </p:sp>
+    </p:spTree>
+    <p:extLst>
+      <p:ext uri="{BB962C8B-B14F-4D97-AF65-F5344CB8AC3E}">
+        <p14:creationId xmlns:p14="http://schemas.microsoft.com/office/powerpoint/2010/main" val="3895766735"/>
+      </p:ext>
+    </p:extLst>
+  </p:cSld>
+  <p:clrMapOvr>
+    <a:masterClrMapping/>
+  </p:clrMapOvr>
+</p:sld>
+</file>
+
+<file path=ppt/slides/slide6.xml><?xml version="1.0" encoding="utf-8"?>
+<p:sld xmlns:a="http://schemas.openxmlformats.org/drawingml/2006/main" xmlns:r="http://schemas.openxmlformats.org/officeDocument/2006/relationships" xmlns:p="http://schemas.openxmlformats.org/presentationml/2006/main">
+  <p:cSld>
+    <p:spTree>
+      <p:nvGrpSpPr>
+        <p:cNvPr id="1" name=""/>
+        <p:cNvGrpSpPr/>
+        <p:nvPr/>
+      </p:nvGrpSpPr>
+      <p:grpSpPr>
+        <a:xfrm>
+          <a:off x="0" y="0"/>
+          <a:ext cx="0" cy="0"/>
+          <a:chOff x="0" y="0"/>
+          <a:chExt cx="0" cy="0"/>
+        </a:xfrm>
+      </p:grpSpPr>
+      <p:sp>
+        <p:nvSpPr>
+          <p:cNvPr id="4" name="テキスト ボックス 3">
+            <a:extLst>
+              <a:ext uri="{FF2B5EF4-FFF2-40B4-BE49-F238E27FC236}">
+                <a16:creationId xmlns:a16="http://schemas.microsoft.com/office/drawing/2014/main" id="{5A13BF46-B8C5-48AA-8308-C9ECFF431A18}"/>
+              </a:ext>
+            </a:extLst>
+          </p:cNvPr>
+          <p:cNvSpPr txBox="1"/>
+          <p:nvPr/>
+        </p:nvSpPr>
+        <p:spPr>
+          <a:xfrm>
+            <a:off x="567542" y="491954"/>
+            <a:ext cx="2513830" cy="584775"/>
+          </a:xfrm>
+          <a:prstGeom prst="rect">
+            <a:avLst/>
+          </a:prstGeom>
+          <a:noFill/>
+        </p:spPr>
+        <p:txBody>
+          <a:bodyPr wrap="none" rtlCol="0">
+            <a:spAutoFit/>
+          </a:bodyPr>
+          <a:lstStyle/>
+          <a:p>
+            <a:r>
+              <a:rPr lang="en-US" altLang="ja-JP" sz="3200" b="1" u="sng" dirty="0"/>
+              <a:t>const</a:t>
+            </a:r>
+            <a:r>
+              <a:rPr lang="ja-JP" altLang="en-US" sz="3200" b="1" u="sng" dirty="0"/>
+              <a:t>修飾子</a:t>
+            </a:r>
+            <a:endParaRPr kumimoji="1" lang="ja-JP" altLang="en-US" sz="3200" b="1" u="sng" dirty="0"/>
+          </a:p>
+        </p:txBody>
+      </p:sp>
+      <p:sp>
+        <p:nvSpPr>
+          <p:cNvPr id="9" name="テキスト ボックス 8">
+            <a:extLst>
+              <a:ext uri="{FF2B5EF4-FFF2-40B4-BE49-F238E27FC236}">
+                <a16:creationId xmlns:a16="http://schemas.microsoft.com/office/drawing/2014/main" id="{80F412F9-EC22-472D-8334-55F86CA5630B}"/>
+              </a:ext>
+            </a:extLst>
+          </p:cNvPr>
+          <p:cNvSpPr txBox="1"/>
+          <p:nvPr/>
+        </p:nvSpPr>
+        <p:spPr>
+          <a:xfrm>
+            <a:off x="567542" y="1189161"/>
+            <a:ext cx="8347157" cy="830997"/>
+          </a:xfrm>
+          <a:prstGeom prst="rect">
+            <a:avLst/>
+          </a:prstGeom>
+          <a:noFill/>
+        </p:spPr>
+        <p:txBody>
+          <a:bodyPr wrap="none" rtlCol="0">
+            <a:spAutoFit/>
+          </a:bodyPr>
+          <a:lstStyle/>
+          <a:p>
+            <a:r>
+              <a:rPr lang="ja-JP" altLang="en-US" sz="2400" dirty="0"/>
+              <a:t>参照先の変数自体は</a:t>
+            </a:r>
+            <a:r>
+              <a:rPr lang="en-US" altLang="ja-JP" sz="2400" b="1" dirty="0">
+                <a:solidFill>
+                  <a:srgbClr val="0070C0"/>
+                </a:solidFill>
+              </a:rPr>
+              <a:t>const</a:t>
+            </a:r>
+            <a:r>
+              <a:rPr lang="ja-JP" altLang="en-US" sz="2400" dirty="0"/>
+              <a:t>ではないので書き換えられます。</a:t>
+            </a:r>
+            <a:endParaRPr lang="en-US" altLang="ja-JP" sz="2400" dirty="0"/>
+          </a:p>
+          <a:p>
+            <a:r>
+              <a:rPr lang="ja-JP" altLang="en-US" sz="2400" dirty="0"/>
+              <a:t>ポインタ自身も加算、減算で動かすことができます。</a:t>
+            </a:r>
+            <a:endParaRPr lang="en-US" altLang="ja-JP" sz="2400" dirty="0"/>
+          </a:p>
+        </p:txBody>
+      </p:sp>
+      <p:pic>
+        <p:nvPicPr>
+          <p:cNvPr id="3" name="図 2">
+            <a:extLst>
+              <a:ext uri="{FF2B5EF4-FFF2-40B4-BE49-F238E27FC236}">
+                <a16:creationId xmlns:a16="http://schemas.microsoft.com/office/drawing/2014/main" id="{5A999C17-8502-4577-93FB-CCB2EA32B4DE}"/>
+              </a:ext>
+            </a:extLst>
+          </p:cNvPr>
+          <p:cNvPicPr>
+            <a:picLocks noChangeAspect="1"/>
+          </p:cNvPicPr>
+          <p:nvPr/>
+        </p:nvPicPr>
+        <p:blipFill>
+          <a:blip r:embed="rId2"/>
+          <a:stretch>
+            <a:fillRect/>
+          </a:stretch>
+        </p:blipFill>
+        <p:spPr>
+          <a:xfrm>
+            <a:off x="567542" y="2132590"/>
+            <a:ext cx="6918567" cy="1652010"/>
+          </a:xfrm>
+          <a:prstGeom prst="rect">
+            <a:avLst/>
+          </a:prstGeom>
+        </p:spPr>
+      </p:pic>
+      <p:sp>
+        <p:nvSpPr>
+          <p:cNvPr id="8" name="テキスト ボックス 7">
+            <a:extLst>
+              <a:ext uri="{FF2B5EF4-FFF2-40B4-BE49-F238E27FC236}">
+                <a16:creationId xmlns:a16="http://schemas.microsoft.com/office/drawing/2014/main" id="{A26A6247-AE19-4996-BCBF-65DBA6BE827E}"/>
+              </a:ext>
+            </a:extLst>
+          </p:cNvPr>
+          <p:cNvSpPr txBox="1"/>
+          <p:nvPr/>
+        </p:nvSpPr>
+        <p:spPr>
+          <a:xfrm>
+            <a:off x="567541" y="3897032"/>
+            <a:ext cx="4185761" cy="461665"/>
+          </a:xfrm>
+          <a:prstGeom prst="rect">
+            <a:avLst/>
+          </a:prstGeom>
+          <a:noFill/>
+        </p:spPr>
+        <p:txBody>
+          <a:bodyPr wrap="none" rtlCol="0">
+            <a:spAutoFit/>
+          </a:bodyPr>
+          <a:lstStyle/>
+          <a:p>
+            <a:r>
+              <a:rPr lang="ja-JP" altLang="en-US" sz="2400" dirty="0"/>
+              <a:t>最後に使用例を練習します。</a:t>
+            </a:r>
+            <a:endParaRPr lang="en-US" altLang="ja-JP" sz="2400" dirty="0"/>
+          </a:p>
+        </p:txBody>
+      </p:sp>
+    </p:spTree>
+    <p:extLst>
+      <p:ext uri="{BB962C8B-B14F-4D97-AF65-F5344CB8AC3E}">
+        <p14:creationId xmlns:p14="http://schemas.microsoft.com/office/powerpoint/2010/main" val="3312710875"/>
+      </p:ext>
+    </p:extLst>
+  </p:cSld>
+  <p:clrMapOvr>
+    <a:masterClrMapping/>
+  </p:clrMapOvr>
+</p:sld>
+</file>
+
+<file path=ppt/slides/slide7.xml><?xml version="1.0" encoding="utf-8"?>
+<p:sld xmlns:a="http://schemas.openxmlformats.org/drawingml/2006/main" xmlns:r="http://schemas.openxmlformats.org/officeDocument/2006/relationships" xmlns:p="http://schemas.openxmlformats.org/presentationml/2006/main">
+  <p:cSld>
+    <p:spTree>
+      <p:nvGrpSpPr>
+        <p:cNvPr id="1" name=""/>
+        <p:cNvGrpSpPr/>
+        <p:nvPr/>
+      </p:nvGrpSpPr>
+      <p:grpSpPr>
+        <a:xfrm>
+          <a:off x="0" y="0"/>
+          <a:ext cx="0" cy="0"/>
+          <a:chOff x="0" y="0"/>
+          <a:chExt cx="0" cy="0"/>
+        </a:xfrm>
+      </p:grpSpPr>
+      <p:sp>
+        <p:nvSpPr>
+          <p:cNvPr id="4" name="テキスト ボックス 3">
+            <a:extLst>
+              <a:ext uri="{FF2B5EF4-FFF2-40B4-BE49-F238E27FC236}">
+                <a16:creationId xmlns:a16="http://schemas.microsoft.com/office/drawing/2014/main" id="{5A13BF46-B8C5-48AA-8308-C9ECFF431A18}"/>
+              </a:ext>
+            </a:extLst>
+          </p:cNvPr>
+          <p:cNvSpPr txBox="1"/>
+          <p:nvPr/>
+        </p:nvSpPr>
+        <p:spPr>
+          <a:xfrm>
+            <a:off x="567542" y="491954"/>
+            <a:ext cx="2513830" cy="584775"/>
+          </a:xfrm>
+          <a:prstGeom prst="rect">
+            <a:avLst/>
+          </a:prstGeom>
+          <a:noFill/>
+        </p:spPr>
+        <p:txBody>
+          <a:bodyPr wrap="none" rtlCol="0">
+            <a:spAutoFit/>
+          </a:bodyPr>
+          <a:lstStyle/>
+          <a:p>
+            <a:r>
+              <a:rPr lang="en-US" altLang="ja-JP" sz="3200" b="1" u="sng" dirty="0"/>
+              <a:t>const</a:t>
+            </a:r>
+            <a:r>
+              <a:rPr lang="ja-JP" altLang="en-US" sz="3200" b="1" u="sng" dirty="0"/>
+              <a:t>修飾子</a:t>
+            </a:r>
+            <a:endParaRPr kumimoji="1" lang="ja-JP" altLang="en-US" sz="3200" b="1" u="sng" dirty="0"/>
+          </a:p>
+        </p:txBody>
+      </p:sp>
+      <p:sp>
+        <p:nvSpPr>
+          <p:cNvPr id="9" name="テキスト ボックス 8">
+            <a:extLst>
+              <a:ext uri="{FF2B5EF4-FFF2-40B4-BE49-F238E27FC236}">
+                <a16:creationId xmlns:a16="http://schemas.microsoft.com/office/drawing/2014/main" id="{80F412F9-EC22-472D-8334-55F86CA5630B}"/>
+              </a:ext>
+            </a:extLst>
+          </p:cNvPr>
+          <p:cNvSpPr txBox="1"/>
+          <p:nvPr/>
+        </p:nvSpPr>
+        <p:spPr>
+          <a:xfrm>
+            <a:off x="567542" y="1189161"/>
+            <a:ext cx="8342348" cy="461665"/>
+          </a:xfrm>
+          <a:prstGeom prst="rect">
+            <a:avLst/>
+          </a:prstGeom>
+          <a:noFill/>
+        </p:spPr>
+        <p:txBody>
+          <a:bodyPr wrap="none" rtlCol="0">
+            <a:spAutoFit/>
+          </a:bodyPr>
+          <a:lstStyle/>
+          <a:p>
+            <a:r>
+              <a:rPr lang="ja-JP" altLang="en-US" sz="2400" dirty="0"/>
+              <a:t>別プロジェクトを作成し</a:t>
+            </a:r>
+            <a:r>
+              <a:rPr lang="en-US" altLang="ja-JP" sz="2400" b="1" dirty="0">
+                <a:solidFill>
+                  <a:srgbClr val="FF0000"/>
+                </a:solidFill>
+              </a:rPr>
+              <a:t>Main.cpp</a:t>
+            </a:r>
+            <a:r>
+              <a:rPr lang="ja-JP" altLang="en-US" sz="2400" dirty="0"/>
+              <a:t>を書きます。（その１）</a:t>
+            </a:r>
+            <a:endParaRPr lang="en-US" altLang="ja-JP" sz="2400" dirty="0"/>
+          </a:p>
+        </p:txBody>
+      </p:sp>
+      <p:pic>
+        <p:nvPicPr>
+          <p:cNvPr id="5" name="図 4">
+            <a:extLst>
+              <a:ext uri="{FF2B5EF4-FFF2-40B4-BE49-F238E27FC236}">
+                <a16:creationId xmlns:a16="http://schemas.microsoft.com/office/drawing/2014/main" id="{14209C7E-B74E-4027-A6A2-65051E6ED72E}"/>
+              </a:ext>
+            </a:extLst>
+          </p:cNvPr>
+          <p:cNvPicPr>
+            <a:picLocks noChangeAspect="1"/>
+          </p:cNvPicPr>
+          <p:nvPr/>
+        </p:nvPicPr>
+        <p:blipFill>
+          <a:blip r:embed="rId2"/>
+          <a:stretch>
+            <a:fillRect/>
+          </a:stretch>
+        </p:blipFill>
+        <p:spPr>
+          <a:xfrm>
+            <a:off x="567542" y="1763258"/>
+            <a:ext cx="8468907" cy="4344006"/>
+          </a:xfrm>
+          <a:prstGeom prst="rect">
+            <a:avLst/>
+          </a:prstGeom>
+        </p:spPr>
+      </p:pic>
+    </p:spTree>
+    <p:extLst>
+      <p:ext uri="{BB962C8B-B14F-4D97-AF65-F5344CB8AC3E}">
+        <p14:creationId xmlns:p14="http://schemas.microsoft.com/office/powerpoint/2010/main" val="3242772576"/>
+      </p:ext>
+    </p:extLst>
+  </p:cSld>
+  <p:clrMapOvr>
+    <a:masterClrMapping/>
+  </p:clrMapOvr>
+</p:sld>
+</file>
+
+<file path=ppt/slides/slide8.xml><?xml version="1.0" encoding="utf-8"?>
+<p:sld xmlns:a="http://schemas.openxmlformats.org/drawingml/2006/main" xmlns:r="http://schemas.openxmlformats.org/officeDocument/2006/relationships" xmlns:p="http://schemas.openxmlformats.org/presentationml/2006/main">
+  <p:cSld>
+    <p:spTree>
+      <p:nvGrpSpPr>
+        <p:cNvPr id="1" name=""/>
+        <p:cNvGrpSpPr/>
+        <p:nvPr/>
+      </p:nvGrpSpPr>
+      <p:grpSpPr>
+        <a:xfrm>
+          <a:off x="0" y="0"/>
+          <a:ext cx="0" cy="0"/>
+          <a:chOff x="0" y="0"/>
+          <a:chExt cx="0" cy="0"/>
+        </a:xfrm>
+      </p:grpSpPr>
+      <p:sp>
+        <p:nvSpPr>
+          <p:cNvPr id="4" name="テキスト ボックス 3">
+            <a:extLst>
+              <a:ext uri="{FF2B5EF4-FFF2-40B4-BE49-F238E27FC236}">
+                <a16:creationId xmlns:a16="http://schemas.microsoft.com/office/drawing/2014/main" id="{5A13BF46-B8C5-48AA-8308-C9ECFF431A18}"/>
+              </a:ext>
+            </a:extLst>
+          </p:cNvPr>
+          <p:cNvSpPr txBox="1"/>
+          <p:nvPr/>
+        </p:nvSpPr>
+        <p:spPr>
+          <a:xfrm>
+            <a:off x="567542" y="491954"/>
+            <a:ext cx="2513830" cy="584775"/>
+          </a:xfrm>
+          <a:prstGeom prst="rect">
+            <a:avLst/>
+          </a:prstGeom>
+          <a:noFill/>
+        </p:spPr>
+        <p:txBody>
+          <a:bodyPr wrap="none" rtlCol="0">
+            <a:spAutoFit/>
+          </a:bodyPr>
+          <a:lstStyle/>
+          <a:p>
+            <a:r>
+              <a:rPr lang="en-US" altLang="ja-JP" sz="3200" b="1" u="sng" dirty="0"/>
+              <a:t>const</a:t>
+            </a:r>
+            <a:r>
+              <a:rPr lang="ja-JP" altLang="en-US" sz="3200" b="1" u="sng" dirty="0"/>
+              <a:t>修飾子</a:t>
+            </a:r>
+            <a:endParaRPr kumimoji="1" lang="ja-JP" altLang="en-US" sz="3200" b="1" u="sng" dirty="0"/>
+          </a:p>
+        </p:txBody>
+      </p:sp>
+      <p:sp>
+        <p:nvSpPr>
+          <p:cNvPr id="9" name="テキスト ボックス 8">
+            <a:extLst>
+              <a:ext uri="{FF2B5EF4-FFF2-40B4-BE49-F238E27FC236}">
+                <a16:creationId xmlns:a16="http://schemas.microsoft.com/office/drawing/2014/main" id="{80F412F9-EC22-472D-8334-55F86CA5630B}"/>
+              </a:ext>
+            </a:extLst>
+          </p:cNvPr>
+          <p:cNvSpPr txBox="1"/>
+          <p:nvPr/>
+        </p:nvSpPr>
+        <p:spPr>
+          <a:xfrm>
+            <a:off x="567542" y="1189161"/>
+            <a:ext cx="4956806" cy="461665"/>
+          </a:xfrm>
+          <a:prstGeom prst="rect">
+            <a:avLst/>
+          </a:prstGeom>
+          <a:noFill/>
+        </p:spPr>
+        <p:txBody>
+          <a:bodyPr wrap="none" rtlCol="0">
+            <a:spAutoFit/>
+          </a:bodyPr>
+          <a:lstStyle/>
+          <a:p>
+            <a:r>
+              <a:rPr lang="en-US" altLang="ja-JP" sz="2400" b="1" dirty="0">
+                <a:solidFill>
+                  <a:srgbClr val="FF0000"/>
+                </a:solidFill>
+              </a:rPr>
+              <a:t>Main.cpp</a:t>
+            </a:r>
+            <a:r>
+              <a:rPr lang="ja-JP" altLang="en-US" sz="2400" dirty="0"/>
+              <a:t>を書きます。（その２）</a:t>
+            </a:r>
+            <a:endParaRPr lang="en-US" altLang="ja-JP" sz="2400" dirty="0"/>
+          </a:p>
+        </p:txBody>
+      </p:sp>
+      <p:pic>
+        <p:nvPicPr>
+          <p:cNvPr id="3" name="図 2">
+            <a:extLst>
+              <a:ext uri="{FF2B5EF4-FFF2-40B4-BE49-F238E27FC236}">
+                <a16:creationId xmlns:a16="http://schemas.microsoft.com/office/drawing/2014/main" id="{BA2DD969-CA28-4D8D-9038-31F56B998A51}"/>
+              </a:ext>
+            </a:extLst>
+          </p:cNvPr>
+          <p:cNvPicPr>
+            <a:picLocks noChangeAspect="1"/>
+          </p:cNvPicPr>
+          <p:nvPr/>
+        </p:nvPicPr>
+        <p:blipFill>
+          <a:blip r:embed="rId2"/>
+          <a:stretch>
+            <a:fillRect/>
+          </a:stretch>
+        </p:blipFill>
+        <p:spPr>
+          <a:xfrm>
+            <a:off x="567543" y="1763258"/>
+            <a:ext cx="6798458" cy="4760459"/>
+          </a:xfrm>
+          <a:prstGeom prst="rect">
+            <a:avLst/>
+          </a:prstGeom>
+        </p:spPr>
+      </p:pic>
+    </p:spTree>
+    <p:extLst>
+      <p:ext uri="{BB962C8B-B14F-4D97-AF65-F5344CB8AC3E}">
+        <p14:creationId xmlns:p14="http://schemas.microsoft.com/office/powerpoint/2010/main" val="2756652442"/>
+      </p:ext>
+    </p:extLst>
+  </p:cSld>
+  <p:clrMapOvr>
+    <a:masterClrMapping/>
+  </p:clrMapOvr>
+</p:sld>
+</file>
+
+<file path=ppt/slides/slide9.xml><?xml version="1.0" encoding="utf-8"?>
+<p:sld xmlns:a="http://schemas.openxmlformats.org/drawingml/2006/main" xmlns:r="http://schemas.openxmlformats.org/officeDocument/2006/relationships" xmlns:p="http://schemas.openxmlformats.org/presentationml/2006/main">
+  <p:cSld>
+    <p:spTree>
+      <p:nvGrpSpPr>
+        <p:cNvPr id="1" name=""/>
+        <p:cNvGrpSpPr/>
+        <p:nvPr/>
+      </p:nvGrpSpPr>
+      <p:grpSpPr>
+        <a:xfrm>
+          <a:off x="0" y="0"/>
+          <a:ext cx="0" cy="0"/>
+          <a:chOff x="0" y="0"/>
+          <a:chExt cx="0" cy="0"/>
+        </a:xfrm>
+      </p:grpSpPr>
+      <p:sp>
+        <p:nvSpPr>
+          <p:cNvPr id="4" name="テキスト ボックス 3">
+            <a:extLst>
+              <a:ext uri="{FF2B5EF4-FFF2-40B4-BE49-F238E27FC236}">
+                <a16:creationId xmlns:a16="http://schemas.microsoft.com/office/drawing/2014/main" id="{5A13BF46-B8C5-48AA-8308-C9ECFF431A18}"/>
+              </a:ext>
+            </a:extLst>
+          </p:cNvPr>
+          <p:cNvSpPr txBox="1"/>
+          <p:nvPr/>
+        </p:nvSpPr>
+        <p:spPr>
+          <a:xfrm>
+            <a:off x="567542" y="491954"/>
+            <a:ext cx="2513830" cy="584775"/>
+          </a:xfrm>
+          <a:prstGeom prst="rect">
+            <a:avLst/>
+          </a:prstGeom>
+          <a:noFill/>
+        </p:spPr>
+        <p:txBody>
+          <a:bodyPr wrap="none" rtlCol="0">
+            <a:spAutoFit/>
+          </a:bodyPr>
+          <a:lstStyle/>
+          <a:p>
+            <a:r>
+              <a:rPr lang="en-US" altLang="ja-JP" sz="3200" b="1" u="sng" dirty="0"/>
+              <a:t>const</a:t>
+            </a:r>
+            <a:r>
+              <a:rPr lang="ja-JP" altLang="en-US" sz="3200" b="1" u="sng" dirty="0"/>
+              <a:t>修飾子</a:t>
+            </a:r>
+            <a:endParaRPr kumimoji="1" lang="ja-JP" altLang="en-US" sz="3200" b="1" u="sng" dirty="0"/>
+          </a:p>
+        </p:txBody>
+      </p:sp>
+      <p:sp>
+        <p:nvSpPr>
+          <p:cNvPr id="9" name="テキスト ボックス 8">
+            <a:extLst>
+              <a:ext uri="{FF2B5EF4-FFF2-40B4-BE49-F238E27FC236}">
+                <a16:creationId xmlns:a16="http://schemas.microsoft.com/office/drawing/2014/main" id="{80F412F9-EC22-472D-8334-55F86CA5630B}"/>
+              </a:ext>
+            </a:extLst>
+          </p:cNvPr>
+          <p:cNvSpPr txBox="1"/>
+          <p:nvPr/>
+        </p:nvSpPr>
+        <p:spPr>
+          <a:xfrm>
+            <a:off x="567542" y="1189161"/>
+            <a:ext cx="10956846" cy="1200329"/>
+          </a:xfrm>
+          <a:prstGeom prst="rect">
+            <a:avLst/>
+          </a:prstGeom>
+          <a:noFill/>
+        </p:spPr>
+        <p:txBody>
+          <a:bodyPr wrap="none" rtlCol="0">
+            <a:spAutoFit/>
+          </a:bodyPr>
+          <a:lstStyle/>
+          <a:p>
+            <a:r>
+              <a:rPr lang="ja-JP" altLang="en-US" sz="2400" dirty="0"/>
+              <a:t>関数の引数をポインタにする場合、</a:t>
+            </a:r>
+            <a:endParaRPr lang="en-US" altLang="ja-JP" sz="2400" dirty="0"/>
+          </a:p>
+          <a:p>
+            <a:r>
+              <a:rPr lang="ja-JP" altLang="en-US" sz="2400" dirty="0"/>
+              <a:t>中身を書き換えてほしくない場合は</a:t>
+            </a:r>
+            <a:r>
+              <a:rPr lang="en-US" altLang="ja-JP" sz="2400" b="1" dirty="0">
+                <a:solidFill>
+                  <a:srgbClr val="0070C0"/>
+                </a:solidFill>
+              </a:rPr>
+              <a:t>const</a:t>
+            </a:r>
+            <a:r>
+              <a:rPr lang="ja-JP" altLang="en-US" sz="2400" dirty="0"/>
+              <a:t>を付けましょう。</a:t>
+            </a:r>
+            <a:endParaRPr lang="en-US" altLang="ja-JP" sz="2400" dirty="0"/>
+          </a:p>
+          <a:p>
+            <a:r>
+              <a:rPr lang="ja-JP" altLang="en-US" sz="2400" dirty="0"/>
+              <a:t>これにより、</a:t>
+            </a:r>
+            <a:r>
+              <a:rPr lang="ja-JP" altLang="en-US" sz="2400" b="1" dirty="0">
+                <a:solidFill>
+                  <a:srgbClr val="FF0000"/>
+                </a:solidFill>
+              </a:rPr>
+              <a:t>引数の中身を書き換えてはいけないという意思表示</a:t>
+            </a:r>
+            <a:r>
+              <a:rPr lang="ja-JP" altLang="en-US" sz="2400" dirty="0"/>
+              <a:t>ができます。</a:t>
+            </a:r>
+            <a:endParaRPr lang="en-US" altLang="ja-JP" sz="2400" dirty="0"/>
+          </a:p>
+        </p:txBody>
+      </p:sp>
+      <p:pic>
+        <p:nvPicPr>
+          <p:cNvPr id="5" name="図 4">
+            <a:extLst>
+              <a:ext uri="{FF2B5EF4-FFF2-40B4-BE49-F238E27FC236}">
+                <a16:creationId xmlns:a16="http://schemas.microsoft.com/office/drawing/2014/main" id="{CC3D798E-87E7-4AE1-ABD9-F6FB8F14A273}"/>
+              </a:ext>
+            </a:extLst>
+          </p:cNvPr>
+          <p:cNvPicPr>
+            <a:picLocks noChangeAspect="1"/>
+          </p:cNvPicPr>
+          <p:nvPr/>
+        </p:nvPicPr>
+        <p:blipFill>
+          <a:blip r:embed="rId2"/>
+          <a:stretch>
+            <a:fillRect/>
+          </a:stretch>
+        </p:blipFill>
+        <p:spPr>
+          <a:xfrm>
+            <a:off x="567542" y="2501922"/>
+            <a:ext cx="9176516" cy="3602545"/>
+          </a:xfrm>
+          <a:prstGeom prst="rect">
+            <a:avLst/>
+          </a:prstGeom>
+        </p:spPr>
+      </p:pic>
+    </p:spTree>
+    <p:extLst>
+      <p:ext uri="{BB962C8B-B14F-4D97-AF65-F5344CB8AC3E}">
+        <p14:creationId xmlns:p14="http://schemas.microsoft.com/office/powerpoint/2010/main" val="3261532876"/>
       </p:ext>
     </p:extLst>
   </p:cSld>
